--- a/docs/presentation.pptx
+++ b/docs/presentation.pptx
@@ -20,6 +20,7 @@
     <p:sldId id="268" r:id="rId19"/>
     <p:sldId id="269" r:id="rId20"/>
     <p:sldId id="270" r:id="rId21"/>
+    <p:sldId id="271" r:id="rId22"/>
   </p:sldIdLst>
   <p:sldSz cx="12188952" cy="6858000" type="screen4x3"/>
   <p:notesSz cx="6858000" cy="9144000"/>
@@ -3384,7 +3385,7 @@
         </p:nvSpPr>
         <p:spPr>
           <a:xfrm>
-            <a:off x="1613916" y="4069080"/>
+            <a:off x="859536" y="4069080"/>
             <a:ext cx="1188720" cy="384048"/>
           </a:xfrm>
           <a:prstGeom prst="rect">
@@ -3427,7 +3428,7 @@
         </p:nvSpPr>
         <p:spPr>
           <a:xfrm>
-            <a:off x="1613916" y="4105656"/>
+            <a:off x="859536" y="4105656"/>
             <a:ext cx="1188720" cy="347472"/>
           </a:xfrm>
           <a:prstGeom prst="rect">
@@ -3461,7 +3462,7 @@
         </p:nvSpPr>
         <p:spPr>
           <a:xfrm>
-            <a:off x="2939796" y="4069080"/>
+            <a:off x="2185416" y="4069080"/>
             <a:ext cx="1737360" cy="384048"/>
           </a:xfrm>
           <a:prstGeom prst="rect">
@@ -3504,7 +3505,7 @@
         </p:nvSpPr>
         <p:spPr>
           <a:xfrm>
-            <a:off x="2939796" y="4105656"/>
+            <a:off x="2185416" y="4105656"/>
             <a:ext cx="1737360" cy="347472"/>
           </a:xfrm>
           <a:prstGeom prst="rect">
@@ -3538,7 +3539,7 @@
         </p:nvSpPr>
         <p:spPr>
           <a:xfrm>
-            <a:off x="4814316" y="4069080"/>
+            <a:off x="4059936" y="4069080"/>
             <a:ext cx="1737360" cy="384048"/>
           </a:xfrm>
           <a:prstGeom prst="rect">
@@ -3581,7 +3582,7 @@
         </p:nvSpPr>
         <p:spPr>
           <a:xfrm>
-            <a:off x="4814316" y="4105656"/>
+            <a:off x="4059936" y="4105656"/>
             <a:ext cx="1737360" cy="347472"/>
           </a:xfrm>
           <a:prstGeom prst="rect">
@@ -3615,7 +3616,7 @@
         </p:nvSpPr>
         <p:spPr>
           <a:xfrm>
-            <a:off x="6688836" y="4069080"/>
+            <a:off x="5934456" y="4069080"/>
             <a:ext cx="2286000" cy="384048"/>
           </a:xfrm>
           <a:prstGeom prst="rect">
@@ -3658,7 +3659,7 @@
         </p:nvSpPr>
         <p:spPr>
           <a:xfrm>
-            <a:off x="6688836" y="4105656"/>
+            <a:off x="5934456" y="4105656"/>
             <a:ext cx="2286000" cy="347472"/>
           </a:xfrm>
           <a:prstGeom prst="rect">
@@ -3692,7 +3693,7 @@
         </p:nvSpPr>
         <p:spPr>
           <a:xfrm>
-            <a:off x="9111996" y="4069080"/>
+            <a:off x="8357616" y="4069080"/>
             <a:ext cx="1463040" cy="384048"/>
           </a:xfrm>
           <a:prstGeom prst="rect">
@@ -3735,7 +3736,7 @@
         </p:nvSpPr>
         <p:spPr>
           <a:xfrm>
-            <a:off x="9111996" y="4105656"/>
+            <a:off x="8357616" y="4105656"/>
             <a:ext cx="1463040" cy="347472"/>
           </a:xfrm>
           <a:prstGeom prst="rect">
@@ -3763,7 +3764,84 @@
       </p:sp>
       <p:sp>
         <p:nvSpPr>
-          <p:cNvPr id="19" name="TextBox 18"/>
+          <p:cNvPr id="19" name="Rectangle 18"/>
+          <p:cNvSpPr/>
+          <p:nvPr/>
+        </p:nvSpPr>
+        <p:spPr>
+          <a:xfrm>
+            <a:off x="9957816" y="4069080"/>
+            <a:ext cx="1371600" cy="384048"/>
+          </a:xfrm>
+          <a:prstGeom prst="rect">
+            <a:avLst/>
+          </a:prstGeom>
+          <a:solidFill>
+            <a:srgbClr val="0F3460"/>
+          </a:solidFill>
+          <a:ln>
+            <a:noFill/>
+          </a:ln>
+        </p:spPr>
+        <p:style>
+          <a:lnRef idx="1">
+            <a:schemeClr val="accent1"/>
+          </a:lnRef>
+          <a:fillRef idx="3">
+            <a:schemeClr val="accent1"/>
+          </a:fillRef>
+          <a:effectRef idx="2">
+            <a:schemeClr val="accent1"/>
+          </a:effectRef>
+          <a:fontRef idx="minor">
+            <a:schemeClr val="lt1"/>
+          </a:fontRef>
+        </p:style>
+        <p:txBody>
+          <a:bodyPr rtlCol="0" anchor="ctr"/>
+          <a:lstStyle/>
+          <a:p>
+            <a:pPr algn="ctr"/>
+          </a:p>
+        </p:txBody>
+      </p:sp>
+      <p:sp>
+        <p:nvSpPr>
+          <p:cNvPr id="20" name="TextBox 19"/>
+          <p:cNvSpPr txBox="1"/>
+          <p:nvPr/>
+        </p:nvSpPr>
+        <p:spPr>
+          <a:xfrm>
+            <a:off x="9957816" y="4105656"/>
+            <a:ext cx="1371600" cy="347472"/>
+          </a:xfrm>
+          <a:prstGeom prst="rect">
+            <a:avLst/>
+          </a:prstGeom>
+          <a:noFill/>
+        </p:spPr>
+        <p:txBody>
+          <a:bodyPr wrap="square">
+            <a:spAutoFit/>
+          </a:bodyPr>
+          <a:lstStyle/>
+          <a:p>
+            <a:pPr algn="ctr"/>
+            <a:r>
+              <a:rPr sz="1200" b="1" i="0">
+                <a:solidFill>
+                  <a:srgbClr val="FFFFFF"/>
+                </a:solidFill>
+              </a:rPr>
+              <a:t>pgvector</a:t>
+            </a:r>
+          </a:p>
+        </p:txBody>
+      </p:sp>
+      <p:sp>
+        <p:nvSpPr>
+          <p:cNvPr id="21" name="TextBox 20"/>
           <p:cNvSpPr txBox="1"/>
           <p:nvPr/>
         </p:nvSpPr>
@@ -3790,7 +3868,7 @@
                   <a:srgbClr val="778899"/>
                 </a:solidFill>
               </a:rPr>
-              <a:t>2026년 7월  |  개발팀  |  Ver 2.0</a:t>
+              <a:t>2026년 7월  |  개발팀  |  Ver 2.1  (RAG 문서 검색 확장 포함)</a:t>
             </a:r>
           </a:p>
         </p:txBody>
@@ -11425,7 +11503,7 @@
                   <a:srgbClr val="FFFFFF"/>
                 </a:solidFill>
               </a:rPr>
-              <a:t>12  향후 로드맵</a:t>
+              <a:t>13  RAG 문서 검색 확장 (신규)</a:t>
             </a:r>
           </a:p>
         </p:txBody>
@@ -11459,7 +11537,7 @@
                   <a:srgbClr val="AABBCC"/>
                 </a:solidFill>
               </a:rPr>
-              <a:t>Future Roadmap</a:t>
+              <a:t>Document RAG Extension — 2026-07-19 추가</a:t>
             </a:r>
           </a:p>
         </p:txBody>
@@ -11515,8 +11593,85 @@
         </p:nvSpPr>
         <p:spPr>
           <a:xfrm>
-            <a:off x="274320" y="1170432"/>
-            <a:ext cx="2743200" cy="621792"/>
+            <a:off x="274320" y="1143000"/>
+            <a:ext cx="11640312" cy="566928"/>
+          </a:xfrm>
+          <a:prstGeom prst="rect">
+            <a:avLst/>
+          </a:prstGeom>
+          <a:solidFill>
+            <a:srgbClr val="222240"/>
+          </a:solidFill>
+          <a:ln>
+            <a:noFill/>
+          </a:ln>
+        </p:spPr>
+        <p:style>
+          <a:lnRef idx="1">
+            <a:schemeClr val="accent1"/>
+          </a:lnRef>
+          <a:fillRef idx="3">
+            <a:schemeClr val="accent1"/>
+          </a:fillRef>
+          <a:effectRef idx="2">
+            <a:schemeClr val="accent1"/>
+          </a:effectRef>
+          <a:fontRef idx="minor">
+            <a:schemeClr val="lt1"/>
+          </a:fontRef>
+        </p:style>
+        <p:txBody>
+          <a:bodyPr rtlCol="0" anchor="ctr"/>
+          <a:lstStyle/>
+          <a:p>
+            <a:pPr algn="ctr"/>
+          </a:p>
+        </p:txBody>
+      </p:sp>
+      <p:sp>
+        <p:nvSpPr>
+          <p:cNvPr id="8" name="TextBox 7"/>
+          <p:cNvSpPr txBox="1"/>
+          <p:nvPr/>
+        </p:nvSpPr>
+        <p:spPr>
+          <a:xfrm>
+            <a:off x="457200" y="1234440"/>
+            <a:ext cx="11247120" cy="384048"/>
+          </a:xfrm>
+          <a:prstGeom prst="rect">
+            <a:avLst/>
+          </a:prstGeom>
+          <a:noFill/>
+        </p:spPr>
+        <p:txBody>
+          <a:bodyPr wrap="square">
+            <a:spAutoFit/>
+          </a:bodyPr>
+          <a:lstStyle/>
+          <a:p>
+            <a:pPr algn="ctr"/>
+            <a:r>
+              <a:rPr sz="1200" b="1" i="0">
+                <a:solidFill>
+                  <a:srgbClr val="FFFFFF"/>
+                </a:solidFill>
+              </a:rPr>
+              <a:t>사내 문서(규정·매뉴얼)를 업로드하면, 챗봇이 SQL 질문과 문서 질문을 자동으로 구분해 같은 창구에서 답변</a:t>
+            </a:r>
+          </a:p>
+        </p:txBody>
+      </p:sp>
+      <p:sp>
+        <p:nvSpPr>
+          <p:cNvPr id="9" name="Rectangle 8"/>
+          <p:cNvSpPr/>
+          <p:nvPr/>
+        </p:nvSpPr>
+        <p:spPr>
+          <a:xfrm>
+            <a:off x="274320" y="1920240"/>
+            <a:ext cx="3520440" cy="566928"/>
           </a:xfrm>
           <a:prstGeom prst="rect">
             <a:avLst/>
@@ -11552,145 +11707,69 @@
       </p:sp>
       <p:sp>
         <p:nvSpPr>
-          <p:cNvPr id="8" name="TextBox 7"/>
-          <p:cNvSpPr txBox="1"/>
-          <p:nvPr/>
-        </p:nvSpPr>
-        <p:spPr>
-          <a:xfrm>
-            <a:off x="365760" y="1188720"/>
-            <a:ext cx="1371600" cy="320040"/>
-          </a:xfrm>
-          <a:prstGeom prst="rect">
-            <a:avLst/>
-          </a:prstGeom>
-          <a:noFill/>
-        </p:spPr>
-        <p:txBody>
-          <a:bodyPr wrap="square">
-            <a:spAutoFit/>
-          </a:bodyPr>
-          <a:lstStyle/>
-          <a:p>
-            <a:pPr algn="l"/>
-            <a:r>
-              <a:rPr sz="1600" b="1" i="0">
+          <p:cNvPr id="10" name="TextBox 9"/>
+          <p:cNvSpPr txBox="1"/>
+          <p:nvPr/>
+        </p:nvSpPr>
+        <p:spPr>
+          <a:xfrm>
+            <a:off x="365760" y="1947672"/>
+            <a:ext cx="3337560" cy="320040"/>
+          </a:xfrm>
+          <a:prstGeom prst="rect">
+            <a:avLst/>
+          </a:prstGeom>
+          <a:noFill/>
+        </p:spPr>
+        <p:txBody>
+          <a:bodyPr wrap="square">
+            <a:spAutoFit/>
+          </a:bodyPr>
+          <a:lstStyle/>
+          <a:p>
+            <a:pPr algn="ctr"/>
+            <a:r>
+              <a:rPr sz="1500" b="1" i="0">
                 <a:solidFill>
                   <a:srgbClr val="FFFFFF"/>
                 </a:solidFill>
               </a:rPr>
-              <a:t>1단계</a:t>
-            </a:r>
-          </a:p>
-        </p:txBody>
-      </p:sp>
-      <p:sp>
-        <p:nvSpPr>
-          <p:cNvPr id="9" name="TextBox 8"/>
-          <p:cNvSpPr txBox="1"/>
-          <p:nvPr/>
-        </p:nvSpPr>
-        <p:spPr>
-          <a:xfrm>
-            <a:off x="1737360" y="1234440"/>
-            <a:ext cx="1188720" cy="274320"/>
-          </a:xfrm>
-          <a:prstGeom prst="rect">
-            <a:avLst/>
-          </a:prstGeom>
-          <a:noFill/>
-        </p:spPr>
-        <p:txBody>
-          <a:bodyPr wrap="square">
-            <a:spAutoFit/>
-          </a:bodyPr>
-          <a:lstStyle/>
-          <a:p>
-            <a:pPr algn="r"/>
-            <a:r>
-              <a:rPr sz="1200" b="0" i="0">
+              <a:t>Client</a:t>
+            </a:r>
+          </a:p>
+        </p:txBody>
+      </p:sp>
+      <p:sp>
+        <p:nvSpPr>
+          <p:cNvPr id="11" name="TextBox 10"/>
+          <p:cNvSpPr txBox="1"/>
+          <p:nvPr/>
+        </p:nvSpPr>
+        <p:spPr>
+          <a:xfrm>
+            <a:off x="365760" y="2221992"/>
+            <a:ext cx="3337560" cy="347472"/>
+          </a:xfrm>
+          <a:prstGeom prst="rect">
+            <a:avLst/>
+          </a:prstGeom>
+          <a:noFill/>
+        </p:spPr>
+        <p:txBody>
+          <a:bodyPr wrap="square">
+            <a:spAutoFit/>
+          </a:bodyPr>
+          <a:lstStyle/>
+          <a:p>
+            <a:pPr algn="ctr"/>
+            <a:r>
+              <a:rPr sz="1000" b="0" i="1">
                 <a:solidFill>
                   <a:srgbClr val="FFFFFF"/>
                 </a:solidFill>
               </a:rPr>
-              <a:t>2주</a:t>
-            </a:r>
-          </a:p>
-        </p:txBody>
-      </p:sp>
-      <p:sp>
-        <p:nvSpPr>
-          <p:cNvPr id="10" name="Rectangle 9"/>
-          <p:cNvSpPr/>
-          <p:nvPr/>
-        </p:nvSpPr>
-        <p:spPr>
-          <a:xfrm>
-            <a:off x="274320" y="1792224"/>
-            <a:ext cx="2743200" cy="438912"/>
-          </a:xfrm>
-          <a:prstGeom prst="rect">
-            <a:avLst/>
-          </a:prstGeom>
-          <a:solidFill>
-            <a:srgbClr val="F4F5F7"/>
-          </a:solidFill>
-          <a:ln>
-            <a:noFill/>
-          </a:ln>
-        </p:spPr>
-        <p:style>
-          <a:lnRef idx="1">
-            <a:schemeClr val="accent1"/>
-          </a:lnRef>
-          <a:fillRef idx="3">
-            <a:schemeClr val="accent1"/>
-          </a:fillRef>
-          <a:effectRef idx="2">
-            <a:schemeClr val="accent1"/>
-          </a:effectRef>
-          <a:fontRef idx="minor">
-            <a:schemeClr val="lt1"/>
-          </a:fontRef>
-        </p:style>
-        <p:txBody>
-          <a:bodyPr rtlCol="0" anchor="ctr"/>
-          <a:lstStyle/>
-          <a:p>
-            <a:pPr algn="ctr"/>
-          </a:p>
-        </p:txBody>
-      </p:sp>
-      <p:sp>
-        <p:nvSpPr>
-          <p:cNvPr id="11" name="TextBox 10"/>
-          <p:cNvSpPr txBox="1"/>
-          <p:nvPr/>
-        </p:nvSpPr>
-        <p:spPr>
-          <a:xfrm>
-            <a:off x="384048" y="1828800"/>
-            <a:ext cx="2560320" cy="347472"/>
-          </a:xfrm>
-          <a:prstGeom prst="rect">
-            <a:avLst/>
-          </a:prstGeom>
-          <a:noFill/>
-        </p:spPr>
-        <p:txBody>
-          <a:bodyPr wrap="square">
-            <a:spAutoFit/>
-          </a:bodyPr>
-          <a:lstStyle/>
-          <a:p>
-            <a:pPr algn="l"/>
-            <a:r>
-              <a:rPr sz="1300" b="1" i="0">
-                <a:solidFill>
-                  <a:srgbClr val="E94560"/>
-                </a:solidFill>
-              </a:rPr>
-              <a:t>인증 &amp; 권한 관리</a:t>
+              <a:t>Vue 3
+:5173</a:t>
             </a:r>
           </a:p>
         </p:txBody>
@@ -11703,8 +11782,8 @@
         </p:nvSpPr>
         <p:spPr>
           <a:xfrm>
-            <a:off x="274320" y="2231136"/>
-            <a:ext cx="2743200" cy="2286000"/>
+            <a:off x="274320" y="2487168"/>
+            <a:ext cx="3520440" cy="1874519"/>
           </a:xfrm>
           <a:prstGeom prst="rect">
             <a:avLst/>
@@ -11746,8 +11825,8 @@
         </p:nvSpPr>
         <p:spPr>
           <a:xfrm>
-            <a:off x="411479" y="2304288"/>
-            <a:ext cx="2514600" cy="566928"/>
+            <a:off x="457200" y="2560320"/>
+            <a:ext cx="3200400" cy="384048"/>
           </a:xfrm>
           <a:prstGeom prst="rect">
             <a:avLst/>
@@ -11762,12 +11841,12 @@
           <a:p>
             <a:pPr algn="l"/>
             <a:r>
-              <a:rPr sz="1200" b="0" i="0">
+              <a:rPr sz="1100" b="0" i="0">
                 <a:solidFill>
                   <a:srgbClr val="1A1A2E"/>
                 </a:solidFill>
               </a:rPr>
-              <a:t>▸  JWT 기반 로그인</a:t>
+              <a:t>▸  📎 문서 업로드 버튼</a:t>
             </a:r>
           </a:p>
         </p:txBody>
@@ -11780,8 +11859,8 @@
         </p:nvSpPr>
         <p:spPr>
           <a:xfrm>
-            <a:off x="411479" y="2962656"/>
-            <a:ext cx="2514600" cy="566928"/>
+            <a:off x="457200" y="2990087"/>
+            <a:ext cx="3200400" cy="384048"/>
           </a:xfrm>
           <a:prstGeom prst="rect">
             <a:avLst/>
@@ -11796,12 +11875,12 @@
           <a:p>
             <a:pPr algn="l"/>
             <a:r>
-              <a:rPr sz="1200" b="0" i="0">
+              <a:rPr sz="1100" b="0" i="0">
                 <a:solidFill>
                   <a:srgbClr val="1A1A2E"/>
                 </a:solidFill>
               </a:rPr>
-              <a:t>▸  역할별 화면 접근 제어</a:t>
+              <a:t>▸  답변 출처·신뢰도 표시</a:t>
             </a:r>
           </a:p>
         </p:txBody>
@@ -11814,8 +11893,8 @@
         </p:nvSpPr>
         <p:spPr>
           <a:xfrm>
-            <a:off x="411479" y="3621024"/>
-            <a:ext cx="2514600" cy="566928"/>
+            <a:off x="457200" y="3419856"/>
+            <a:ext cx="3200400" cy="384048"/>
           </a:xfrm>
           <a:prstGeom prst="rect">
             <a:avLst/>
@@ -11830,26 +11909,94 @@
           <a:p>
             <a:pPr algn="l"/>
             <a:r>
-              <a:rPr sz="1200" b="0" i="0">
+              <a:rPr sz="1100" b="0" i="0">
                 <a:solidFill>
                   <a:srgbClr val="1A1A2E"/>
                 </a:solidFill>
               </a:rPr>
-              <a:t>▸  감사 로그 기록</a:t>
-            </a:r>
-          </a:p>
-        </p:txBody>
-      </p:sp>
-      <p:sp>
-        <p:nvSpPr>
-          <p:cNvPr id="16" name="Rectangle 15"/>
+              <a:t>▸  문서 관리 화면 (목록/삭제)</a:t>
+            </a:r>
+          </a:p>
+        </p:txBody>
+      </p:sp>
+      <p:sp>
+        <p:nvSpPr>
+          <p:cNvPr id="16" name="TextBox 15"/>
+          <p:cNvSpPr txBox="1"/>
+          <p:nvPr/>
+        </p:nvSpPr>
+        <p:spPr>
+          <a:xfrm>
+            <a:off x="457200" y="3849624"/>
+            <a:ext cx="3200400" cy="384048"/>
+          </a:xfrm>
+          <a:prstGeom prst="rect">
+            <a:avLst/>
+          </a:prstGeom>
+          <a:noFill/>
+        </p:spPr>
+        <p:txBody>
+          <a:bodyPr wrap="square">
+            <a:spAutoFit/>
+          </a:bodyPr>
+          <a:lstStyle/>
+          <a:p>
+            <a:pPr algn="l"/>
+            <a:r>
+              <a:rPr sz="1100" b="0" i="0">
+                <a:solidFill>
+                  <a:srgbClr val="1A1A2E"/>
+                </a:solidFill>
+              </a:rPr>
+              <a:t>▸  vue-router 없이 화면 토글</a:t>
+            </a:r>
+          </a:p>
+        </p:txBody>
+      </p:sp>
+      <p:sp>
+        <p:nvSpPr>
+          <p:cNvPr id="17" name="TextBox 16"/>
+          <p:cNvSpPr txBox="1"/>
+          <p:nvPr/>
+        </p:nvSpPr>
+        <p:spPr>
+          <a:xfrm>
+            <a:off x="3813048" y="3200400"/>
+            <a:ext cx="320040" cy="457200"/>
+          </a:xfrm>
+          <a:prstGeom prst="rect">
+            <a:avLst/>
+          </a:prstGeom>
+          <a:noFill/>
+        </p:spPr>
+        <p:txBody>
+          <a:bodyPr wrap="square">
+            <a:spAutoFit/>
+          </a:bodyPr>
+          <a:lstStyle/>
+          <a:p>
+            <a:pPr algn="ctr"/>
+            <a:r>
+              <a:rPr sz="1800" b="0" i="0">
+                <a:solidFill>
+                  <a:srgbClr val="777777"/>
+                </a:solidFill>
+              </a:rPr>
+              <a:t>▶</a:t>
+            </a:r>
+          </a:p>
+        </p:txBody>
+      </p:sp>
+      <p:sp>
+        <p:nvSpPr>
+          <p:cNvPr id="18" name="Rectangle 17"/>
           <p:cNvSpPr/>
           <p:nvPr/>
         </p:nvSpPr>
         <p:spPr>
           <a:xfrm>
-            <a:off x="3200400" y="1170432"/>
-            <a:ext cx="2743200" cy="621792"/>
+            <a:off x="4114800" y="1920240"/>
+            <a:ext cx="3520440" cy="566928"/>
           </a:xfrm>
           <a:prstGeom prst="rect">
             <a:avLst/>
@@ -11885,145 +12032,69 @@
       </p:sp>
       <p:sp>
         <p:nvSpPr>
-          <p:cNvPr id="17" name="TextBox 16"/>
-          <p:cNvSpPr txBox="1"/>
-          <p:nvPr/>
-        </p:nvSpPr>
-        <p:spPr>
-          <a:xfrm>
-            <a:off x="3291840" y="1188720"/>
-            <a:ext cx="1371600" cy="320040"/>
-          </a:xfrm>
-          <a:prstGeom prst="rect">
-            <a:avLst/>
-          </a:prstGeom>
-          <a:noFill/>
-        </p:spPr>
-        <p:txBody>
-          <a:bodyPr wrap="square">
-            <a:spAutoFit/>
-          </a:bodyPr>
-          <a:lstStyle/>
-          <a:p>
-            <a:pPr algn="l"/>
-            <a:r>
-              <a:rPr sz="1600" b="1" i="0">
+          <p:cNvPr id="19" name="TextBox 18"/>
+          <p:cNvSpPr txBox="1"/>
+          <p:nvPr/>
+        </p:nvSpPr>
+        <p:spPr>
+          <a:xfrm>
+            <a:off x="4206240" y="1947672"/>
+            <a:ext cx="3337560" cy="320040"/>
+          </a:xfrm>
+          <a:prstGeom prst="rect">
+            <a:avLst/>
+          </a:prstGeom>
+          <a:noFill/>
+        </p:spPr>
+        <p:txBody>
+          <a:bodyPr wrap="square">
+            <a:spAutoFit/>
+          </a:bodyPr>
+          <a:lstStyle/>
+          <a:p>
+            <a:pPr algn="ctr"/>
+            <a:r>
+              <a:rPr sz="1500" b="1" i="0">
                 <a:solidFill>
                   <a:srgbClr val="FFFFFF"/>
                 </a:solidFill>
               </a:rPr>
-              <a:t>2단계</a:t>
-            </a:r>
-          </a:p>
-        </p:txBody>
-      </p:sp>
-      <p:sp>
-        <p:nvSpPr>
-          <p:cNvPr id="18" name="TextBox 17"/>
-          <p:cNvSpPr txBox="1"/>
-          <p:nvPr/>
-        </p:nvSpPr>
-        <p:spPr>
-          <a:xfrm>
-            <a:off x="4663440" y="1234440"/>
-            <a:ext cx="1188720" cy="274320"/>
-          </a:xfrm>
-          <a:prstGeom prst="rect">
-            <a:avLst/>
-          </a:prstGeom>
-          <a:noFill/>
-        </p:spPr>
-        <p:txBody>
-          <a:bodyPr wrap="square">
-            <a:spAutoFit/>
-          </a:bodyPr>
-          <a:lstStyle/>
-          <a:p>
-            <a:pPr algn="r"/>
-            <a:r>
-              <a:rPr sz="1200" b="0" i="0">
+              <a:t>Backend</a:t>
+            </a:r>
+          </a:p>
+        </p:txBody>
+      </p:sp>
+      <p:sp>
+        <p:nvSpPr>
+          <p:cNvPr id="20" name="TextBox 19"/>
+          <p:cNvSpPr txBox="1"/>
+          <p:nvPr/>
+        </p:nvSpPr>
+        <p:spPr>
+          <a:xfrm>
+            <a:off x="4206240" y="2221992"/>
+            <a:ext cx="3337560" cy="347472"/>
+          </a:xfrm>
+          <a:prstGeom prst="rect">
+            <a:avLst/>
+          </a:prstGeom>
+          <a:noFill/>
+        </p:spPr>
+        <p:txBody>
+          <a:bodyPr wrap="square">
+            <a:spAutoFit/>
+          </a:bodyPr>
+          <a:lstStyle/>
+          <a:p>
+            <a:pPr algn="ctr"/>
+            <a:r>
+              <a:rPr sz="1000" b="0" i="1">
                 <a:solidFill>
                   <a:srgbClr val="FFFFFF"/>
                 </a:solidFill>
               </a:rPr>
-              <a:t>4주</a:t>
-            </a:r>
-          </a:p>
-        </p:txBody>
-      </p:sp>
-      <p:sp>
-        <p:nvSpPr>
-          <p:cNvPr id="19" name="Rectangle 18"/>
-          <p:cNvSpPr/>
-          <p:nvPr/>
-        </p:nvSpPr>
-        <p:spPr>
-          <a:xfrm>
-            <a:off x="3200400" y="1792224"/>
-            <a:ext cx="2743200" cy="438912"/>
-          </a:xfrm>
-          <a:prstGeom prst="rect">
-            <a:avLst/>
-          </a:prstGeom>
-          <a:solidFill>
-            <a:srgbClr val="EEEEFF"/>
-          </a:solidFill>
-          <a:ln>
-            <a:noFill/>
-          </a:ln>
-        </p:spPr>
-        <p:style>
-          <a:lnRef idx="1">
-            <a:schemeClr val="accent1"/>
-          </a:lnRef>
-          <a:fillRef idx="3">
-            <a:schemeClr val="accent1"/>
-          </a:fillRef>
-          <a:effectRef idx="2">
-            <a:schemeClr val="accent1"/>
-          </a:effectRef>
-          <a:fontRef idx="minor">
-            <a:schemeClr val="lt1"/>
-          </a:fontRef>
-        </p:style>
-        <p:txBody>
-          <a:bodyPr rtlCol="0" anchor="ctr"/>
-          <a:lstStyle/>
-          <a:p>
-            <a:pPr algn="ctr"/>
-          </a:p>
-        </p:txBody>
-      </p:sp>
-      <p:sp>
-        <p:nvSpPr>
-          <p:cNvPr id="20" name="TextBox 19"/>
-          <p:cNvSpPr txBox="1"/>
-          <p:nvPr/>
-        </p:nvSpPr>
-        <p:spPr>
-          <a:xfrm>
-            <a:off x="3310128" y="1828800"/>
-            <a:ext cx="2560320" cy="347472"/>
-          </a:xfrm>
-          <a:prstGeom prst="rect">
-            <a:avLst/>
-          </a:prstGeom>
-          <a:noFill/>
-        </p:spPr>
-        <p:txBody>
-          <a:bodyPr wrap="square">
-            <a:spAutoFit/>
-          </a:bodyPr>
-          <a:lstStyle/>
-          <a:p>
-            <a:pPr algn="l"/>
-            <a:r>
-              <a:rPr sz="1300" b="1" i="0">
-                <a:solidFill>
-                  <a:srgbClr val="0F3460"/>
-                </a:solidFill>
-              </a:rPr>
-              <a:t>로컬 LLM 전환</a:t>
+              <a:t>Spring Boot
+:8080 (기존)</a:t>
             </a:r>
           </a:p>
         </p:txBody>
@@ -12036,8 +12107,8 @@
         </p:nvSpPr>
         <p:spPr>
           <a:xfrm>
-            <a:off x="3200400" y="2231136"/>
-            <a:ext cx="2743200" cy="2286000"/>
+            <a:off x="4114800" y="2487168"/>
+            <a:ext cx="3520440" cy="1874519"/>
           </a:xfrm>
           <a:prstGeom prst="rect">
             <a:avLst/>
@@ -12079,8 +12150,8 @@
         </p:nvSpPr>
         <p:spPr>
           <a:xfrm>
-            <a:off x="3337560" y="2304288"/>
-            <a:ext cx="2514600" cy="566928"/>
+            <a:off x="4297680" y="2560320"/>
+            <a:ext cx="3200400" cy="384048"/>
           </a:xfrm>
           <a:prstGeom prst="rect">
             <a:avLst/>
@@ -12095,12 +12166,12 @@
           <a:p>
             <a:pPr algn="l"/>
             <a:r>
-              <a:rPr sz="1200" b="0" i="0">
+              <a:rPr sz="1100" b="0" i="0">
                 <a:solidFill>
                   <a:srgbClr val="1A1A2E"/>
                 </a:solidFill>
               </a:rPr>
-              <a:t>▸  vLLM + Qwen2.5-14B</a:t>
+              <a:t>▸  질문 자동 분류 (SQL/문서)</a:t>
             </a:r>
           </a:p>
         </p:txBody>
@@ -12113,8 +12184,8 @@
         </p:nvSpPr>
         <p:spPr>
           <a:xfrm>
-            <a:off x="3337560" y="2962656"/>
-            <a:ext cx="2514600" cy="566928"/>
+            <a:off x="4297680" y="2990087"/>
+            <a:ext cx="3200400" cy="384048"/>
           </a:xfrm>
           <a:prstGeom prst="rect">
             <a:avLst/>
@@ -12129,12 +12200,12 @@
           <a:p>
             <a:pPr algn="l"/>
             <a:r>
-              <a:rPr sz="1200" b="0" i="0">
+              <a:rPr sz="1100" b="0" i="0">
                 <a:solidFill>
                   <a:srgbClr val="1A1A2E"/>
                 </a:solidFill>
               </a:rPr>
-              <a:t>▸  내부 GPU 서버 구축</a:t>
+              <a:t>▸  문서 API 프록시(중계)</a:t>
             </a:r>
           </a:p>
         </p:txBody>
@@ -12147,8 +12218,8 @@
         </p:nvSpPr>
         <p:spPr>
           <a:xfrm>
-            <a:off x="3337560" y="3621024"/>
-            <a:ext cx="2514600" cy="566928"/>
+            <a:off x="4297680" y="3419856"/>
+            <a:ext cx="3200400" cy="384048"/>
           </a:xfrm>
           <a:prstGeom prst="rect">
             <a:avLst/>
@@ -12163,26 +12234,462 @@
           <a:p>
             <a:pPr algn="l"/>
             <a:r>
-              <a:rPr sz="1200" b="0" i="0">
+              <a:rPr sz="1100" b="0" i="0">
                 <a:solidFill>
                   <a:srgbClr val="1A1A2E"/>
                 </a:solidFill>
               </a:rPr>
-              <a:t>▸  외부망 완전 차단 운영</a:t>
-            </a:r>
-          </a:p>
-        </p:txBody>
-      </p:sp>
-      <p:sp>
-        <p:nvSpPr>
-          <p:cNvPr id="25" name="Rectangle 24"/>
+              <a:t>▸  근거 기반 답변 생성(Claude)</a:t>
+            </a:r>
+          </a:p>
+        </p:txBody>
+      </p:sp>
+      <p:sp>
+        <p:nvSpPr>
+          <p:cNvPr id="25" name="TextBox 24"/>
+          <p:cNvSpPr txBox="1"/>
+          <p:nvPr/>
+        </p:nvSpPr>
+        <p:spPr>
+          <a:xfrm>
+            <a:off x="4297680" y="3849624"/>
+            <a:ext cx="3200400" cy="384048"/>
+          </a:xfrm>
+          <a:prstGeom prst="rect">
+            <a:avLst/>
+          </a:prstGeom>
+          <a:noFill/>
+        </p:spPr>
+        <p:txBody>
+          <a:bodyPr wrap="square">
+            <a:spAutoFit/>
+          </a:bodyPr>
+          <a:lstStyle/>
+          <a:p>
+            <a:pPr algn="l"/>
+            <a:r>
+              <a:rPr sz="1100" b="0" i="0">
+                <a:solidFill>
+                  <a:srgbClr val="1A1A2E"/>
+                </a:solidFill>
+              </a:rPr>
+              <a:t>▸  기존 NL2SQL 변경 없음</a:t>
+            </a:r>
+          </a:p>
+        </p:txBody>
+      </p:sp>
+      <p:sp>
+        <p:nvSpPr>
+          <p:cNvPr id="26" name="TextBox 25"/>
+          <p:cNvSpPr txBox="1"/>
+          <p:nvPr/>
+        </p:nvSpPr>
+        <p:spPr>
+          <a:xfrm>
+            <a:off x="7653528" y="3200400"/>
+            <a:ext cx="320040" cy="457200"/>
+          </a:xfrm>
+          <a:prstGeom prst="rect">
+            <a:avLst/>
+          </a:prstGeom>
+          <a:noFill/>
+        </p:spPr>
+        <p:txBody>
+          <a:bodyPr wrap="square">
+            <a:spAutoFit/>
+          </a:bodyPr>
+          <a:lstStyle/>
+          <a:p>
+            <a:pPr algn="ctr"/>
+            <a:r>
+              <a:rPr sz="1800" b="0" i="0">
+                <a:solidFill>
+                  <a:srgbClr val="777777"/>
+                </a:solidFill>
+              </a:rPr>
+              <a:t>▶</a:t>
+            </a:r>
+          </a:p>
+        </p:txBody>
+      </p:sp>
+      <p:sp>
+        <p:nvSpPr>
+          <p:cNvPr id="27" name="Rectangle 26"/>
           <p:cNvSpPr/>
           <p:nvPr/>
         </p:nvSpPr>
         <p:spPr>
           <a:xfrm>
-            <a:off x="6126480" y="1170432"/>
-            <a:ext cx="2743200" cy="621792"/>
+            <a:off x="7955280" y="1920240"/>
+            <a:ext cx="3520440" cy="566928"/>
+          </a:xfrm>
+          <a:prstGeom prst="rect">
+            <a:avLst/>
+          </a:prstGeom>
+          <a:solidFill>
+            <a:srgbClr val="F5A623"/>
+          </a:solidFill>
+          <a:ln>
+            <a:noFill/>
+          </a:ln>
+        </p:spPr>
+        <p:style>
+          <a:lnRef idx="1">
+            <a:schemeClr val="accent1"/>
+          </a:lnRef>
+          <a:fillRef idx="3">
+            <a:schemeClr val="accent1"/>
+          </a:fillRef>
+          <a:effectRef idx="2">
+            <a:schemeClr val="accent1"/>
+          </a:effectRef>
+          <a:fontRef idx="minor">
+            <a:schemeClr val="lt1"/>
+          </a:fontRef>
+        </p:style>
+        <p:txBody>
+          <a:bodyPr rtlCol="0" anchor="ctr"/>
+          <a:lstStyle/>
+          <a:p>
+            <a:pPr algn="ctr"/>
+          </a:p>
+        </p:txBody>
+      </p:sp>
+      <p:sp>
+        <p:nvSpPr>
+          <p:cNvPr id="28" name="TextBox 27"/>
+          <p:cNvSpPr txBox="1"/>
+          <p:nvPr/>
+        </p:nvSpPr>
+        <p:spPr>
+          <a:xfrm>
+            <a:off x="8046720" y="1947672"/>
+            <a:ext cx="3337560" cy="320040"/>
+          </a:xfrm>
+          <a:prstGeom prst="rect">
+            <a:avLst/>
+          </a:prstGeom>
+          <a:noFill/>
+        </p:spPr>
+        <p:txBody>
+          <a:bodyPr wrap="square">
+            <a:spAutoFit/>
+          </a:bodyPr>
+          <a:lstStyle/>
+          <a:p>
+            <a:pPr algn="ctr"/>
+            <a:r>
+              <a:rPr sz="1500" b="1" i="0">
+                <a:solidFill>
+                  <a:srgbClr val="1A1A2E"/>
+                </a:solidFill>
+              </a:rPr>
+              <a:t>rag-service</a:t>
+            </a:r>
+          </a:p>
+        </p:txBody>
+      </p:sp>
+      <p:sp>
+        <p:nvSpPr>
+          <p:cNvPr id="29" name="TextBox 28"/>
+          <p:cNvSpPr txBox="1"/>
+          <p:nvPr/>
+        </p:nvSpPr>
+        <p:spPr>
+          <a:xfrm>
+            <a:off x="8046720" y="2221992"/>
+            <a:ext cx="3337560" cy="347472"/>
+          </a:xfrm>
+          <a:prstGeom prst="rect">
+            <a:avLst/>
+          </a:prstGeom>
+          <a:noFill/>
+        </p:spPr>
+        <p:txBody>
+          <a:bodyPr wrap="square">
+            <a:spAutoFit/>
+          </a:bodyPr>
+          <a:lstStyle/>
+          <a:p>
+            <a:pPr algn="ctr"/>
+            <a:r>
+              <a:rPr sz="1000" b="0" i="1">
+                <a:solidFill>
+                  <a:srgbClr val="1A1A2E"/>
+                </a:solidFill>
+              </a:rPr>
+              <a:t>Spring Boot
+:8081 (신규)</a:t>
+            </a:r>
+          </a:p>
+        </p:txBody>
+      </p:sp>
+      <p:sp>
+        <p:nvSpPr>
+          <p:cNvPr id="30" name="Rectangle 29"/>
+          <p:cNvSpPr/>
+          <p:nvPr/>
+        </p:nvSpPr>
+        <p:spPr>
+          <a:xfrm>
+            <a:off x="7955280" y="2487168"/>
+            <a:ext cx="3520440" cy="1874519"/>
+          </a:xfrm>
+          <a:prstGeom prst="rect">
+            <a:avLst/>
+          </a:prstGeom>
+          <a:solidFill>
+            <a:srgbClr val="FFFFFF"/>
+          </a:solidFill>
+          <a:ln>
+            <a:noFill/>
+          </a:ln>
+        </p:spPr>
+        <p:style>
+          <a:lnRef idx="1">
+            <a:schemeClr val="accent1"/>
+          </a:lnRef>
+          <a:fillRef idx="3">
+            <a:schemeClr val="accent1"/>
+          </a:fillRef>
+          <a:effectRef idx="2">
+            <a:schemeClr val="accent1"/>
+          </a:effectRef>
+          <a:fontRef idx="minor">
+            <a:schemeClr val="lt1"/>
+          </a:fontRef>
+        </p:style>
+        <p:txBody>
+          <a:bodyPr rtlCol="0" anchor="ctr"/>
+          <a:lstStyle/>
+          <a:p>
+            <a:pPr algn="ctr"/>
+          </a:p>
+        </p:txBody>
+      </p:sp>
+      <p:sp>
+        <p:nvSpPr>
+          <p:cNvPr id="31" name="TextBox 30"/>
+          <p:cNvSpPr txBox="1"/>
+          <p:nvPr/>
+        </p:nvSpPr>
+        <p:spPr>
+          <a:xfrm>
+            <a:off x="8138160" y="2560320"/>
+            <a:ext cx="3200400" cy="384048"/>
+          </a:xfrm>
+          <a:prstGeom prst="rect">
+            <a:avLst/>
+          </a:prstGeom>
+          <a:noFill/>
+        </p:spPr>
+        <p:txBody>
+          <a:bodyPr wrap="square">
+            <a:spAutoFit/>
+          </a:bodyPr>
+          <a:lstStyle/>
+          <a:p>
+            <a:pPr algn="l"/>
+            <a:r>
+              <a:rPr sz="1100" b="0" i="0">
+                <a:solidFill>
+                  <a:srgbClr val="1A1A2E"/>
+                </a:solidFill>
+              </a:rPr>
+              <a:t>▸  Tika 파싱 (PDF/DOCX/TXT)</a:t>
+            </a:r>
+          </a:p>
+        </p:txBody>
+      </p:sp>
+      <p:sp>
+        <p:nvSpPr>
+          <p:cNvPr id="32" name="TextBox 31"/>
+          <p:cNvSpPr txBox="1"/>
+          <p:nvPr/>
+        </p:nvSpPr>
+        <p:spPr>
+          <a:xfrm>
+            <a:off x="8138160" y="2990087"/>
+            <a:ext cx="3200400" cy="384048"/>
+          </a:xfrm>
+          <a:prstGeom prst="rect">
+            <a:avLst/>
+          </a:prstGeom>
+          <a:noFill/>
+        </p:spPr>
+        <p:txBody>
+          <a:bodyPr wrap="square">
+            <a:spAutoFit/>
+          </a:bodyPr>
+          <a:lstStyle/>
+          <a:p>
+            <a:pPr algn="l"/>
+            <a:r>
+              <a:rPr sz="1100" b="0" i="0">
+                <a:solidFill>
+                  <a:srgbClr val="1A1A2E"/>
+                </a:solidFill>
+              </a:rPr>
+              <a:t>▸  청킹: 800자, 10% overlap</a:t>
+            </a:r>
+          </a:p>
+        </p:txBody>
+      </p:sp>
+      <p:sp>
+        <p:nvSpPr>
+          <p:cNvPr id="33" name="TextBox 32"/>
+          <p:cNvSpPr txBox="1"/>
+          <p:nvPr/>
+        </p:nvSpPr>
+        <p:spPr>
+          <a:xfrm>
+            <a:off x="8138160" y="3419856"/>
+            <a:ext cx="3200400" cy="384048"/>
+          </a:xfrm>
+          <a:prstGeom prst="rect">
+            <a:avLst/>
+          </a:prstGeom>
+          <a:noFill/>
+        </p:spPr>
+        <p:txBody>
+          <a:bodyPr wrap="square">
+            <a:spAutoFit/>
+          </a:bodyPr>
+          <a:lstStyle/>
+          <a:p>
+            <a:pPr algn="l"/>
+            <a:r>
+              <a:rPr sz="1100" b="0" i="0">
+                <a:solidFill>
+                  <a:srgbClr val="1A1A2E"/>
+                </a:solidFill>
+              </a:rPr>
+              <a:t>▸  임베딩 (OpenAI/해싱 폴백)</a:t>
+            </a:r>
+          </a:p>
+        </p:txBody>
+      </p:sp>
+      <p:sp>
+        <p:nvSpPr>
+          <p:cNvPr id="34" name="TextBox 33"/>
+          <p:cNvSpPr txBox="1"/>
+          <p:nvPr/>
+        </p:nvSpPr>
+        <p:spPr>
+          <a:xfrm>
+            <a:off x="8138160" y="3849624"/>
+            <a:ext cx="3200400" cy="384048"/>
+          </a:xfrm>
+          <a:prstGeom prst="rect">
+            <a:avLst/>
+          </a:prstGeom>
+          <a:noFill/>
+        </p:spPr>
+        <p:txBody>
+          <a:bodyPr wrap="square">
+            <a:spAutoFit/>
+          </a:bodyPr>
+          <a:lstStyle/>
+          <a:p>
+            <a:pPr algn="l"/>
+            <a:r>
+              <a:rPr sz="1100" b="0" i="0">
+                <a:solidFill>
+                  <a:srgbClr val="1A1A2E"/>
+                </a:solidFill>
+              </a:rPr>
+              <a:t>▸  pgvector 코사인 검색</a:t>
+            </a:r>
+          </a:p>
+        </p:txBody>
+      </p:sp>
+      <p:sp>
+        <p:nvSpPr>
+          <p:cNvPr id="35" name="Rectangle 34"/>
+          <p:cNvSpPr/>
+          <p:nvPr/>
+        </p:nvSpPr>
+        <p:spPr>
+          <a:xfrm>
+            <a:off x="274320" y="4526280"/>
+            <a:ext cx="11640312" cy="411480"/>
+          </a:xfrm>
+          <a:prstGeom prst="rect">
+            <a:avLst/>
+          </a:prstGeom>
+          <a:solidFill>
+            <a:srgbClr val="533483"/>
+          </a:solidFill>
+          <a:ln>
+            <a:noFill/>
+          </a:ln>
+        </p:spPr>
+        <p:style>
+          <a:lnRef idx="1">
+            <a:schemeClr val="accent1"/>
+          </a:lnRef>
+          <a:fillRef idx="3">
+            <a:schemeClr val="accent1"/>
+          </a:fillRef>
+          <a:effectRef idx="2">
+            <a:schemeClr val="accent1"/>
+          </a:effectRef>
+          <a:fontRef idx="minor">
+            <a:schemeClr val="lt1"/>
+          </a:fontRef>
+        </p:style>
+        <p:txBody>
+          <a:bodyPr rtlCol="0" anchor="ctr"/>
+          <a:lstStyle/>
+          <a:p>
+            <a:pPr algn="ctr"/>
+          </a:p>
+        </p:txBody>
+      </p:sp>
+      <p:sp>
+        <p:nvSpPr>
+          <p:cNvPr id="36" name="TextBox 35"/>
+          <p:cNvSpPr txBox="1"/>
+          <p:nvPr/>
+        </p:nvSpPr>
+        <p:spPr>
+          <a:xfrm>
+            <a:off x="411480" y="4553712"/>
+            <a:ext cx="11430000" cy="365760"/>
+          </a:xfrm>
+          <a:prstGeom prst="rect">
+            <a:avLst/>
+          </a:prstGeom>
+          <a:noFill/>
+        </p:spPr>
+        <p:txBody>
+          <a:bodyPr wrap="square">
+            <a:spAutoFit/>
+          </a:bodyPr>
+          <a:lstStyle/>
+          <a:p>
+            <a:pPr algn="l"/>
+            <a:r>
+              <a:rPr sz="1200" b="1" i="0">
+                <a:solidFill>
+                  <a:srgbClr val="FFFFFF"/>
+                </a:solidFill>
+              </a:rPr>
+              <a:t>신규 API 4종  (모두 backend /api 경유, rag-service는 외부 미노출)</a:t>
+            </a:r>
+          </a:p>
+        </p:txBody>
+      </p:sp>
+      <p:sp>
+        <p:nvSpPr>
+          <p:cNvPr id="37" name="Rectangle 36"/>
+          <p:cNvSpPr/>
+          <p:nvPr/>
+        </p:nvSpPr>
+        <p:spPr>
+          <a:xfrm>
+            <a:off x="411480" y="5029200"/>
+            <a:ext cx="2468880" cy="411480"/>
           </a:xfrm>
           <a:prstGeom prst="rect">
             <a:avLst/>
@@ -12218,88 +12725,54 @@
       </p:sp>
       <p:sp>
         <p:nvSpPr>
-          <p:cNvPr id="26" name="TextBox 25"/>
-          <p:cNvSpPr txBox="1"/>
-          <p:nvPr/>
-        </p:nvSpPr>
-        <p:spPr>
-          <a:xfrm>
-            <a:off x="6217920" y="1188720"/>
-            <a:ext cx="1371600" cy="320040"/>
-          </a:xfrm>
-          <a:prstGeom prst="rect">
-            <a:avLst/>
-          </a:prstGeom>
-          <a:noFill/>
-        </p:spPr>
-        <p:txBody>
-          <a:bodyPr wrap="square">
-            <a:spAutoFit/>
-          </a:bodyPr>
-          <a:lstStyle/>
-          <a:p>
-            <a:pPr algn="l"/>
-            <a:r>
-              <a:rPr sz="1600" b="1" i="0">
+          <p:cNvPr id="38" name="TextBox 37"/>
+          <p:cNvSpPr txBox="1"/>
+          <p:nvPr/>
+        </p:nvSpPr>
+        <p:spPr>
+          <a:xfrm>
+            <a:off x="411480" y="5065776"/>
+            <a:ext cx="2468880" cy="374904"/>
+          </a:xfrm>
+          <a:prstGeom prst="rect">
+            <a:avLst/>
+          </a:prstGeom>
+          <a:noFill/>
+        </p:spPr>
+        <p:txBody>
+          <a:bodyPr wrap="square">
+            <a:spAutoFit/>
+          </a:bodyPr>
+          <a:lstStyle/>
+          <a:p>
+            <a:pPr algn="ctr"/>
+            <a:r>
+              <a:rPr sz="1100" b="1" i="0">
                 <a:solidFill>
                   <a:srgbClr val="FFFFFF"/>
                 </a:solidFill>
               </a:rPr>
-              <a:t>3단계</a:t>
-            </a:r>
-          </a:p>
-        </p:txBody>
-      </p:sp>
-      <p:sp>
-        <p:nvSpPr>
-          <p:cNvPr id="27" name="TextBox 26"/>
-          <p:cNvSpPr txBox="1"/>
-          <p:nvPr/>
-        </p:nvSpPr>
-        <p:spPr>
-          <a:xfrm>
-            <a:off x="7589520" y="1234440"/>
-            <a:ext cx="1188720" cy="274320"/>
-          </a:xfrm>
-          <a:prstGeom prst="rect">
-            <a:avLst/>
-          </a:prstGeom>
-          <a:noFill/>
-        </p:spPr>
-        <p:txBody>
-          <a:bodyPr wrap="square">
-            <a:spAutoFit/>
-          </a:bodyPr>
-          <a:lstStyle/>
-          <a:p>
-            <a:pPr algn="r"/>
-            <a:r>
-              <a:rPr sz="1200" b="0" i="0">
-                <a:solidFill>
-                  <a:srgbClr val="FFFFFF"/>
-                </a:solidFill>
-              </a:rPr>
-              <a:t>3주</a:t>
-            </a:r>
-          </a:p>
-        </p:txBody>
-      </p:sp>
-      <p:sp>
-        <p:nvSpPr>
-          <p:cNvPr id="28" name="Rectangle 27"/>
+              <a:t>POST /api/ai/chat</a:t>
+            </a:r>
+          </a:p>
+        </p:txBody>
+      </p:sp>
+      <p:sp>
+        <p:nvSpPr>
+          <p:cNvPr id="39" name="Rectangle 38"/>
           <p:cNvSpPr/>
           <p:nvPr/>
         </p:nvSpPr>
         <p:spPr>
           <a:xfrm>
-            <a:off x="6126480" y="1792224"/>
-            <a:ext cx="2743200" cy="438912"/>
+            <a:off x="3017520" y="5029200"/>
+            <a:ext cx="3108960" cy="411480"/>
           </a:xfrm>
           <a:prstGeom prst="rect">
             <a:avLst/>
           </a:prstGeom>
           <a:solidFill>
-            <a:srgbClr val="F4F5F7"/>
+            <a:srgbClr val="1A1A2E"/>
           </a:solidFill>
           <a:ln>
             <a:noFill/>
@@ -12329,54 +12802,54 @@
       </p:sp>
       <p:sp>
         <p:nvSpPr>
-          <p:cNvPr id="29" name="TextBox 28"/>
-          <p:cNvSpPr txBox="1"/>
-          <p:nvPr/>
-        </p:nvSpPr>
-        <p:spPr>
-          <a:xfrm>
-            <a:off x="6236208" y="1828800"/>
-            <a:ext cx="2560320" cy="347472"/>
-          </a:xfrm>
-          <a:prstGeom prst="rect">
-            <a:avLst/>
-          </a:prstGeom>
-          <a:noFill/>
-        </p:spPr>
-        <p:txBody>
-          <a:bodyPr wrap="square">
-            <a:spAutoFit/>
-          </a:bodyPr>
-          <a:lstStyle/>
-          <a:p>
-            <a:pPr algn="l"/>
-            <a:r>
-              <a:rPr sz="1300" b="1" i="0">
-                <a:solidFill>
-                  <a:srgbClr val="1A1A2E"/>
-                </a:solidFill>
-              </a:rPr>
-              <a:t>실시간 MES 연동</a:t>
-            </a:r>
-          </a:p>
-        </p:txBody>
-      </p:sp>
-      <p:sp>
-        <p:nvSpPr>
-          <p:cNvPr id="30" name="Rectangle 29"/>
+          <p:cNvPr id="40" name="TextBox 39"/>
+          <p:cNvSpPr txBox="1"/>
+          <p:nvPr/>
+        </p:nvSpPr>
+        <p:spPr>
+          <a:xfrm>
+            <a:off x="3017520" y="5065776"/>
+            <a:ext cx="3108960" cy="374904"/>
+          </a:xfrm>
+          <a:prstGeom prst="rect">
+            <a:avLst/>
+          </a:prstGeom>
+          <a:noFill/>
+        </p:spPr>
+        <p:txBody>
+          <a:bodyPr wrap="square">
+            <a:spAutoFit/>
+          </a:bodyPr>
+          <a:lstStyle/>
+          <a:p>
+            <a:pPr algn="ctr"/>
+            <a:r>
+              <a:rPr sz="1100" b="1" i="0">
+                <a:solidFill>
+                  <a:srgbClr val="FFFFFF"/>
+                </a:solidFill>
+              </a:rPr>
+              <a:t>POST /api/documents/upload</a:t>
+            </a:r>
+          </a:p>
+        </p:txBody>
+      </p:sp>
+      <p:sp>
+        <p:nvSpPr>
+          <p:cNvPr id="41" name="Rectangle 40"/>
           <p:cNvSpPr/>
           <p:nvPr/>
         </p:nvSpPr>
         <p:spPr>
           <a:xfrm>
-            <a:off x="6126480" y="2231136"/>
-            <a:ext cx="2743200" cy="2286000"/>
+            <a:off x="6263640" y="5029200"/>
+            <a:ext cx="2331720" cy="411480"/>
           </a:xfrm>
           <a:prstGeom prst="rect">
             <a:avLst/>
           </a:prstGeom>
           <a:solidFill>
-            <a:srgbClr val="FFFFFF"/>
+            <a:srgbClr val="1A1A2E"/>
           </a:solidFill>
           <a:ln>
             <a:noFill/>
@@ -12406,122 +12879,54 @@
       </p:sp>
       <p:sp>
         <p:nvSpPr>
-          <p:cNvPr id="31" name="TextBox 30"/>
-          <p:cNvSpPr txBox="1"/>
-          <p:nvPr/>
-        </p:nvSpPr>
-        <p:spPr>
-          <a:xfrm>
-            <a:off x="6263640" y="2304288"/>
-            <a:ext cx="2514600" cy="566928"/>
-          </a:xfrm>
-          <a:prstGeom prst="rect">
-            <a:avLst/>
-          </a:prstGeom>
-          <a:noFill/>
-        </p:spPr>
-        <p:txBody>
-          <a:bodyPr wrap="square">
-            <a:spAutoFit/>
-          </a:bodyPr>
-          <a:lstStyle/>
-          <a:p>
-            <a:pPr algn="l"/>
-            <a:r>
-              <a:rPr sz="1200" b="0" i="0">
-                <a:solidFill>
-                  <a:srgbClr val="1A1A2E"/>
-                </a:solidFill>
-              </a:rPr>
-              <a:t>▸  CDC (Debezium+Kafka)</a:t>
-            </a:r>
-          </a:p>
-        </p:txBody>
-      </p:sp>
-      <p:sp>
-        <p:nvSpPr>
-          <p:cNvPr id="32" name="TextBox 31"/>
-          <p:cNvSpPr txBox="1"/>
-          <p:nvPr/>
-        </p:nvSpPr>
-        <p:spPr>
-          <a:xfrm>
-            <a:off x="6263640" y="2962656"/>
-            <a:ext cx="2514600" cy="566928"/>
-          </a:xfrm>
-          <a:prstGeom prst="rect">
-            <a:avLst/>
-          </a:prstGeom>
-          <a:noFill/>
-        </p:spPr>
-        <p:txBody>
-          <a:bodyPr wrap="square">
-            <a:spAutoFit/>
-          </a:bodyPr>
-          <a:lstStyle/>
-          <a:p>
-            <a:pPr algn="l"/>
-            <a:r>
-              <a:rPr sz="1200" b="0" i="0">
-                <a:solidFill>
-                  <a:srgbClr val="1A1A2E"/>
-                </a:solidFill>
-              </a:rPr>
-              <a:t>▸  WebSocket 실시간 차트</a:t>
-            </a:r>
-          </a:p>
-        </p:txBody>
-      </p:sp>
-      <p:sp>
-        <p:nvSpPr>
-          <p:cNvPr id="33" name="TextBox 32"/>
-          <p:cNvSpPr txBox="1"/>
-          <p:nvPr/>
-        </p:nvSpPr>
-        <p:spPr>
-          <a:xfrm>
-            <a:off x="6263640" y="3621024"/>
-            <a:ext cx="2514600" cy="566928"/>
-          </a:xfrm>
-          <a:prstGeom prst="rect">
-            <a:avLst/>
-          </a:prstGeom>
-          <a:noFill/>
-        </p:spPr>
-        <p:txBody>
-          <a:bodyPr wrap="square">
-            <a:spAutoFit/>
-          </a:bodyPr>
-          <a:lstStyle/>
-          <a:p>
-            <a:pPr algn="l"/>
-            <a:r>
-              <a:rPr sz="1200" b="0" i="0">
-                <a:solidFill>
-                  <a:srgbClr val="1A1A2E"/>
-                </a:solidFill>
-              </a:rPr>
-              <a:t>▸  수율 알림 경보</a:t>
-            </a:r>
-          </a:p>
-        </p:txBody>
-      </p:sp>
-      <p:sp>
-        <p:nvSpPr>
-          <p:cNvPr id="34" name="Rectangle 33"/>
+          <p:cNvPr id="42" name="TextBox 41"/>
+          <p:cNvSpPr txBox="1"/>
+          <p:nvPr/>
+        </p:nvSpPr>
+        <p:spPr>
+          <a:xfrm>
+            <a:off x="6263640" y="5065776"/>
+            <a:ext cx="2331720" cy="374904"/>
+          </a:xfrm>
+          <a:prstGeom prst="rect">
+            <a:avLst/>
+          </a:prstGeom>
+          <a:noFill/>
+        </p:spPr>
+        <p:txBody>
+          <a:bodyPr wrap="square">
+            <a:spAutoFit/>
+          </a:bodyPr>
+          <a:lstStyle/>
+          <a:p>
+            <a:pPr algn="ctr"/>
+            <a:r>
+              <a:rPr sz="1100" b="1" i="0">
+                <a:solidFill>
+                  <a:srgbClr val="FFFFFF"/>
+                </a:solidFill>
+              </a:rPr>
+              <a:t>GET /api/documents</a:t>
+            </a:r>
+          </a:p>
+        </p:txBody>
+      </p:sp>
+      <p:sp>
+        <p:nvSpPr>
+          <p:cNvPr id="43" name="Rectangle 42"/>
           <p:cNvSpPr/>
           <p:nvPr/>
         </p:nvSpPr>
         <p:spPr>
           <a:xfrm>
-            <a:off x="9052560" y="1170432"/>
-            <a:ext cx="2743200" cy="621792"/>
+            <a:off x="8732520" y="5029200"/>
+            <a:ext cx="2606040" cy="411480"/>
           </a:xfrm>
           <a:prstGeom prst="rect">
             <a:avLst/>
           </a:prstGeom>
           <a:solidFill>
-            <a:srgbClr val="2B9348"/>
+            <a:srgbClr val="1A1A2E"/>
           </a:solidFill>
           <a:ln>
             <a:noFill/>
@@ -12551,304 +12956,48 @@
       </p:sp>
       <p:sp>
         <p:nvSpPr>
-          <p:cNvPr id="35" name="TextBox 34"/>
-          <p:cNvSpPr txBox="1"/>
-          <p:nvPr/>
-        </p:nvSpPr>
-        <p:spPr>
-          <a:xfrm>
-            <a:off x="9144000" y="1188720"/>
-            <a:ext cx="1371600" cy="320040"/>
-          </a:xfrm>
-          <a:prstGeom prst="rect">
-            <a:avLst/>
-          </a:prstGeom>
-          <a:noFill/>
-        </p:spPr>
-        <p:txBody>
-          <a:bodyPr wrap="square">
-            <a:spAutoFit/>
-          </a:bodyPr>
-          <a:lstStyle/>
-          <a:p>
-            <a:pPr algn="l"/>
-            <a:r>
-              <a:rPr sz="1600" b="1" i="0">
+          <p:cNvPr id="44" name="TextBox 43"/>
+          <p:cNvSpPr txBox="1"/>
+          <p:nvPr/>
+        </p:nvSpPr>
+        <p:spPr>
+          <a:xfrm>
+            <a:off x="8732520" y="5065776"/>
+            <a:ext cx="2606040" cy="374904"/>
+          </a:xfrm>
+          <a:prstGeom prst="rect">
+            <a:avLst/>
+          </a:prstGeom>
+          <a:noFill/>
+        </p:spPr>
+        <p:txBody>
+          <a:bodyPr wrap="square">
+            <a:spAutoFit/>
+          </a:bodyPr>
+          <a:lstStyle/>
+          <a:p>
+            <a:pPr algn="ctr"/>
+            <a:r>
+              <a:rPr sz="1100" b="1" i="0">
                 <a:solidFill>
                   <a:srgbClr val="FFFFFF"/>
                 </a:solidFill>
               </a:rPr>
-              <a:t>4단계</a:t>
-            </a:r>
-          </a:p>
-        </p:txBody>
-      </p:sp>
-      <p:sp>
-        <p:nvSpPr>
-          <p:cNvPr id="36" name="TextBox 35"/>
-          <p:cNvSpPr txBox="1"/>
-          <p:nvPr/>
-        </p:nvSpPr>
-        <p:spPr>
-          <a:xfrm>
-            <a:off x="10515600" y="1234440"/>
-            <a:ext cx="1188720" cy="274320"/>
-          </a:xfrm>
-          <a:prstGeom prst="rect">
-            <a:avLst/>
-          </a:prstGeom>
-          <a:noFill/>
-        </p:spPr>
-        <p:txBody>
-          <a:bodyPr wrap="square">
-            <a:spAutoFit/>
-          </a:bodyPr>
-          <a:lstStyle/>
-          <a:p>
-            <a:pPr algn="r"/>
-            <a:r>
-              <a:rPr sz="1200" b="0" i="0">
-                <a:solidFill>
-                  <a:srgbClr val="FFFFFF"/>
-                </a:solidFill>
-              </a:rPr>
-              <a:t>2주</a:t>
-            </a:r>
-          </a:p>
-        </p:txBody>
-      </p:sp>
-      <p:sp>
-        <p:nvSpPr>
-          <p:cNvPr id="37" name="Rectangle 36"/>
+              <a:t>DELETE /api/documents/{id}</a:t>
+            </a:r>
+          </a:p>
+        </p:txBody>
+      </p:sp>
+      <p:sp>
+        <p:nvSpPr>
+          <p:cNvPr id="45" name="Rectangle 44"/>
           <p:cNvSpPr/>
           <p:nvPr/>
         </p:nvSpPr>
         <p:spPr>
           <a:xfrm>
-            <a:off x="9052560" y="1792224"/>
-            <a:ext cx="2743200" cy="438912"/>
-          </a:xfrm>
-          <a:prstGeom prst="rect">
-            <a:avLst/>
-          </a:prstGeom>
-          <a:solidFill>
-            <a:srgbClr val="F4F5F7"/>
-          </a:solidFill>
-          <a:ln>
-            <a:noFill/>
-          </a:ln>
-        </p:spPr>
-        <p:style>
-          <a:lnRef idx="1">
-            <a:schemeClr val="accent1"/>
-          </a:lnRef>
-          <a:fillRef idx="3">
-            <a:schemeClr val="accent1"/>
-          </a:fillRef>
-          <a:effectRef idx="2">
-            <a:schemeClr val="accent1"/>
-          </a:effectRef>
-          <a:fontRef idx="minor">
-            <a:schemeClr val="lt1"/>
-          </a:fontRef>
-        </p:style>
-        <p:txBody>
-          <a:bodyPr rtlCol="0" anchor="ctr"/>
-          <a:lstStyle/>
-          <a:p>
-            <a:pPr algn="ctr"/>
-          </a:p>
-        </p:txBody>
-      </p:sp>
-      <p:sp>
-        <p:nvSpPr>
-          <p:cNvPr id="38" name="TextBox 37"/>
-          <p:cNvSpPr txBox="1"/>
-          <p:nvPr/>
-        </p:nvSpPr>
-        <p:spPr>
-          <a:xfrm>
-            <a:off x="9162288" y="1828800"/>
-            <a:ext cx="2560320" cy="347472"/>
-          </a:xfrm>
-          <a:prstGeom prst="rect">
-            <a:avLst/>
-          </a:prstGeom>
-          <a:noFill/>
-        </p:spPr>
-        <p:txBody>
-          <a:bodyPr wrap="square">
-            <a:spAutoFit/>
-          </a:bodyPr>
-          <a:lstStyle/>
-          <a:p>
-            <a:pPr algn="l"/>
-            <a:r>
-              <a:rPr sz="1300" b="1" i="0">
-                <a:solidFill>
-                  <a:srgbClr val="2B9348"/>
-                </a:solidFill>
-              </a:rPr>
-              <a:t>알림 &amp; 리포팅</a:t>
-            </a:r>
-          </a:p>
-        </p:txBody>
-      </p:sp>
-      <p:sp>
-        <p:nvSpPr>
-          <p:cNvPr id="39" name="Rectangle 38"/>
-          <p:cNvSpPr/>
-          <p:nvPr/>
-        </p:nvSpPr>
-        <p:spPr>
-          <a:xfrm>
-            <a:off x="9052560" y="2231136"/>
-            <a:ext cx="2743200" cy="2286000"/>
-          </a:xfrm>
-          <a:prstGeom prst="rect">
-            <a:avLst/>
-          </a:prstGeom>
-          <a:solidFill>
-            <a:srgbClr val="FFFFFF"/>
-          </a:solidFill>
-          <a:ln>
-            <a:noFill/>
-          </a:ln>
-        </p:spPr>
-        <p:style>
-          <a:lnRef idx="1">
-            <a:schemeClr val="accent1"/>
-          </a:lnRef>
-          <a:fillRef idx="3">
-            <a:schemeClr val="accent1"/>
-          </a:fillRef>
-          <a:effectRef idx="2">
-            <a:schemeClr val="accent1"/>
-          </a:effectRef>
-          <a:fontRef idx="minor">
-            <a:schemeClr val="lt1"/>
-          </a:fontRef>
-        </p:style>
-        <p:txBody>
-          <a:bodyPr rtlCol="0" anchor="ctr"/>
-          <a:lstStyle/>
-          <a:p>
-            <a:pPr algn="ctr"/>
-          </a:p>
-        </p:txBody>
-      </p:sp>
-      <p:sp>
-        <p:nvSpPr>
-          <p:cNvPr id="40" name="TextBox 39"/>
-          <p:cNvSpPr txBox="1"/>
-          <p:nvPr/>
-        </p:nvSpPr>
-        <p:spPr>
-          <a:xfrm>
-            <a:off x="9189720" y="2304288"/>
-            <a:ext cx="2514600" cy="566928"/>
-          </a:xfrm>
-          <a:prstGeom prst="rect">
-            <a:avLst/>
-          </a:prstGeom>
-          <a:noFill/>
-        </p:spPr>
-        <p:txBody>
-          <a:bodyPr wrap="square">
-            <a:spAutoFit/>
-          </a:bodyPr>
-          <a:lstStyle/>
-          <a:p>
-            <a:pPr algn="l"/>
-            <a:r>
-              <a:rPr sz="1200" b="0" i="0">
-                <a:solidFill>
-                  <a:srgbClr val="1A1A2E"/>
-                </a:solidFill>
-              </a:rPr>
-              <a:t>▸  임계값 경보 (Slack/이메일)</a:t>
-            </a:r>
-          </a:p>
-        </p:txBody>
-      </p:sp>
-      <p:sp>
-        <p:nvSpPr>
-          <p:cNvPr id="41" name="TextBox 40"/>
-          <p:cNvSpPr txBox="1"/>
-          <p:nvPr/>
-        </p:nvSpPr>
-        <p:spPr>
-          <a:xfrm>
-            <a:off x="9189720" y="2962656"/>
-            <a:ext cx="2514600" cy="566928"/>
-          </a:xfrm>
-          <a:prstGeom prst="rect">
-            <a:avLst/>
-          </a:prstGeom>
-          <a:noFill/>
-        </p:spPr>
-        <p:txBody>
-          <a:bodyPr wrap="square">
-            <a:spAutoFit/>
-          </a:bodyPr>
-          <a:lstStyle/>
-          <a:p>
-            <a:pPr algn="l"/>
-            <a:r>
-              <a:rPr sz="1200" b="0" i="0">
-                <a:solidFill>
-                  <a:srgbClr val="1A1A2E"/>
-                </a:solidFill>
-              </a:rPr>
-              <a:t>▸  PDF 자동 리포트</a:t>
-            </a:r>
-          </a:p>
-        </p:txBody>
-      </p:sp>
-      <p:sp>
-        <p:nvSpPr>
-          <p:cNvPr id="42" name="TextBox 41"/>
-          <p:cNvSpPr txBox="1"/>
-          <p:nvPr/>
-        </p:nvSpPr>
-        <p:spPr>
-          <a:xfrm>
-            <a:off x="9189720" y="3621024"/>
-            <a:ext cx="2514600" cy="566928"/>
-          </a:xfrm>
-          <a:prstGeom prst="rect">
-            <a:avLst/>
-          </a:prstGeom>
-          <a:noFill/>
-        </p:spPr>
-        <p:txBody>
-          <a:bodyPr wrap="square">
-            <a:spAutoFit/>
-          </a:bodyPr>
-          <a:lstStyle/>
-          <a:p>
-            <a:pPr algn="l"/>
-            <a:r>
-              <a:rPr sz="1200" b="0" i="0">
-                <a:solidFill>
-                  <a:srgbClr val="1A1A2E"/>
-                </a:solidFill>
-              </a:rPr>
-              <a:t>▸  구독형 일간 리포트</a:t>
-            </a:r>
-          </a:p>
-        </p:txBody>
-      </p:sp>
-      <p:sp>
-        <p:nvSpPr>
-          <p:cNvPr id="43" name="Rectangle 42"/>
-          <p:cNvSpPr/>
-          <p:nvPr/>
-        </p:nvSpPr>
-        <p:spPr>
-          <a:xfrm>
-            <a:off x="274320" y="4663440"/>
-            <a:ext cx="11640312" cy="1234440"/>
+            <a:off x="274320" y="5623560"/>
+            <a:ext cx="11640312" cy="914400"/>
           </a:xfrm>
           <a:prstGeom prst="rect">
             <a:avLst/>
@@ -12884,14 +13033,14 @@
       </p:sp>
       <p:sp>
         <p:nvSpPr>
-          <p:cNvPr id="44" name="TextBox 43"/>
-          <p:cNvSpPr txBox="1"/>
-          <p:nvPr/>
-        </p:nvSpPr>
-        <p:spPr>
-          <a:xfrm>
-            <a:off x="457200" y="4709160"/>
-            <a:ext cx="11247120" cy="411480"/>
+          <p:cNvPr id="46" name="TextBox 45"/>
+          <p:cNvSpPr txBox="1"/>
+          <p:nvPr/>
+        </p:nvSpPr>
+        <p:spPr>
+          <a:xfrm>
+            <a:off x="457200" y="5687568"/>
+            <a:ext cx="11247120" cy="804672"/>
           </a:xfrm>
           <a:prstGeom prst="rect">
             <a:avLst/>
@@ -12906,48 +13055,13 @@
           <a:p>
             <a:pPr algn="l"/>
             <a:r>
-              <a:rPr sz="1500" b="1" i="0">
+              <a:rPr sz="1150" b="1" i="0">
                 <a:solidFill>
                   <a:srgbClr val="1A1A2E"/>
                 </a:solidFill>
               </a:rPr>
-              <a:t>핵심: 로컬 LLM 전환 (2단계)</a:t>
-            </a:r>
-          </a:p>
-        </p:txBody>
-      </p:sp>
-      <p:sp>
-        <p:nvSpPr>
-          <p:cNvPr id="45" name="TextBox 44"/>
-          <p:cNvSpPr txBox="1"/>
-          <p:nvPr/>
-        </p:nvSpPr>
-        <p:spPr>
-          <a:xfrm>
-            <a:off x="457200" y="5102352"/>
-            <a:ext cx="11247120" cy="749808"/>
-          </a:xfrm>
-          <a:prstGeom prst="rect">
-            <a:avLst/>
-          </a:prstGeom>
-          <a:noFill/>
-        </p:spPr>
-        <p:txBody>
-          <a:bodyPr wrap="square">
-            <a:spAutoFit/>
-          </a:bodyPr>
-          <a:lstStyle/>
-          <a:p>
-            <a:pPr algn="l"/>
-            <a:r>
-              <a:rPr sz="1200" b="0" i="0">
-                <a:solidFill>
-                  <a:srgbClr val="1A1A2E"/>
-                </a:solidFill>
-              </a:rPr>
-              <a:t>현재 Claude API  →  내부 GPU 서버 + Qwen2.5-14B (또는 Llama 3.3-70B)
-데이터가 외부로 전송되지 않아 사내 보안 정책 완전 준수  |  파운드리 공정 데이터 완전 내부 보관
-코드 변경 최소화:  application.yml URL·모델명 변경 + local-llm.enabled=true 로 전환 완료</a:t>
+              <a:t>왜 별도 모듈(rag-service)인가:  검색(Retrieval)과 생성(Generation)의 책임을 분리 — rag-service는 검색만, backend는 기존처럼 Claude 호출/가드레일 전담
+왜 안전한가:  루트 pom.xml은 두 모듈을 묶기만 할 뿐 backend/pom.xml은 그대로 — 기존 Docker/Railway 배포 파이프라인 무변경</a:t>
             </a:r>
           </a:p>
         </p:txBody>
@@ -12985,6 +13099,49 @@
             <a:avLst/>
           </a:prstGeom>
           <a:solidFill>
+            <a:srgbClr val="F4F5F7"/>
+          </a:solidFill>
+          <a:ln>
+            <a:noFill/>
+          </a:ln>
+        </p:spPr>
+        <p:style>
+          <a:lnRef idx="1">
+            <a:schemeClr val="accent1"/>
+          </a:lnRef>
+          <a:fillRef idx="3">
+            <a:schemeClr val="accent1"/>
+          </a:fillRef>
+          <a:effectRef idx="2">
+            <a:schemeClr val="accent1"/>
+          </a:effectRef>
+          <a:fontRef idx="minor">
+            <a:schemeClr val="lt1"/>
+          </a:fontRef>
+        </p:style>
+        <p:txBody>
+          <a:bodyPr rtlCol="0" anchor="ctr"/>
+          <a:lstStyle/>
+          <a:p>
+            <a:pPr algn="ctr"/>
+          </a:p>
+        </p:txBody>
+      </p:sp>
+      <p:sp>
+        <p:nvSpPr>
+          <p:cNvPr id="3" name="Rectangle 2"/>
+          <p:cNvSpPr/>
+          <p:nvPr/>
+        </p:nvSpPr>
+        <p:spPr>
+          <a:xfrm>
+            <a:off x="0" y="0"/>
+            <a:ext cx="12188952" cy="1005840"/>
+          </a:xfrm>
+          <a:prstGeom prst="rect">
+            <a:avLst/>
+          </a:prstGeom>
+          <a:solidFill>
             <a:srgbClr val="1A1A2E"/>
           </a:solidFill>
           <a:ln>
@@ -13015,14 +13172,82 @@
       </p:sp>
       <p:sp>
         <p:nvSpPr>
-          <p:cNvPr id="3" name="Rectangle 2"/>
+          <p:cNvPr id="4" name="TextBox 3"/>
+          <p:cNvSpPr txBox="1"/>
+          <p:nvPr/>
+        </p:nvSpPr>
+        <p:spPr>
+          <a:xfrm>
+            <a:off x="365760" y="118872"/>
+            <a:ext cx="10972800" cy="658368"/>
+          </a:xfrm>
+          <a:prstGeom prst="rect">
+            <a:avLst/>
+          </a:prstGeom>
+          <a:noFill/>
+        </p:spPr>
+        <p:txBody>
+          <a:bodyPr wrap="square">
+            <a:spAutoFit/>
+          </a:bodyPr>
+          <a:lstStyle/>
+          <a:p>
+            <a:pPr algn="l"/>
+            <a:r>
+              <a:rPr sz="2600" b="1" i="0">
+                <a:solidFill>
+                  <a:srgbClr val="FFFFFF"/>
+                </a:solidFill>
+              </a:rPr>
+              <a:t>14  향후 로드맵</a:t>
+            </a:r>
+          </a:p>
+        </p:txBody>
+      </p:sp>
+      <p:sp>
+        <p:nvSpPr>
+          <p:cNvPr id="5" name="TextBox 4"/>
+          <p:cNvSpPr txBox="1"/>
+          <p:nvPr/>
+        </p:nvSpPr>
+        <p:spPr>
+          <a:xfrm>
+            <a:off x="365760" y="667512"/>
+            <a:ext cx="10972800" cy="310896"/>
+          </a:xfrm>
+          <a:prstGeom prst="rect">
+            <a:avLst/>
+          </a:prstGeom>
+          <a:noFill/>
+        </p:spPr>
+        <p:txBody>
+          <a:bodyPr wrap="square">
+            <a:spAutoFit/>
+          </a:bodyPr>
+          <a:lstStyle/>
+          <a:p>
+            <a:pPr algn="l"/>
+            <a:r>
+              <a:rPr sz="1200" b="0" i="1">
+                <a:solidFill>
+                  <a:srgbClr val="AABBCC"/>
+                </a:solidFill>
+              </a:rPr>
+              <a:t>Future Roadmap</a:t>
+            </a:r>
+          </a:p>
+        </p:txBody>
+      </p:sp>
+      <p:sp>
+        <p:nvSpPr>
+          <p:cNvPr id="6" name="Rectangle 5"/>
           <p:cNvSpPr/>
           <p:nvPr/>
         </p:nvSpPr>
         <p:spPr>
           <a:xfrm>
-            <a:off x="0" y="0"/>
-            <a:ext cx="12188952" cy="64008"/>
+            <a:off x="0" y="1005840"/>
+            <a:ext cx="12188952" cy="36576"/>
           </a:xfrm>
           <a:prstGeom prst="rect">
             <a:avLst/>
@@ -13058,14 +13283,347 @@
       </p:sp>
       <p:sp>
         <p:nvSpPr>
-          <p:cNvPr id="4" name="Rectangle 3"/>
+          <p:cNvPr id="7" name="Rectangle 6"/>
           <p:cNvSpPr/>
           <p:nvPr/>
         </p:nvSpPr>
         <p:spPr>
           <a:xfrm>
-            <a:off x="0" y="6793992"/>
-            <a:ext cx="12188952" cy="64008"/>
+            <a:off x="274320" y="1170432"/>
+            <a:ext cx="2743200" cy="621792"/>
+          </a:xfrm>
+          <a:prstGeom prst="rect">
+            <a:avLst/>
+          </a:prstGeom>
+          <a:solidFill>
+            <a:srgbClr val="F5A623"/>
+          </a:solidFill>
+          <a:ln>
+            <a:noFill/>
+          </a:ln>
+        </p:spPr>
+        <p:style>
+          <a:lnRef idx="1">
+            <a:schemeClr val="accent1"/>
+          </a:lnRef>
+          <a:fillRef idx="3">
+            <a:schemeClr val="accent1"/>
+          </a:fillRef>
+          <a:effectRef idx="2">
+            <a:schemeClr val="accent1"/>
+          </a:effectRef>
+          <a:fontRef idx="minor">
+            <a:schemeClr val="lt1"/>
+          </a:fontRef>
+        </p:style>
+        <p:txBody>
+          <a:bodyPr rtlCol="0" anchor="ctr"/>
+          <a:lstStyle/>
+          <a:p>
+            <a:pPr algn="ctr"/>
+          </a:p>
+        </p:txBody>
+      </p:sp>
+      <p:sp>
+        <p:nvSpPr>
+          <p:cNvPr id="8" name="TextBox 7"/>
+          <p:cNvSpPr txBox="1"/>
+          <p:nvPr/>
+        </p:nvSpPr>
+        <p:spPr>
+          <a:xfrm>
+            <a:off x="365760" y="1188720"/>
+            <a:ext cx="1371600" cy="320040"/>
+          </a:xfrm>
+          <a:prstGeom prst="rect">
+            <a:avLst/>
+          </a:prstGeom>
+          <a:noFill/>
+        </p:spPr>
+        <p:txBody>
+          <a:bodyPr wrap="square">
+            <a:spAutoFit/>
+          </a:bodyPr>
+          <a:lstStyle/>
+          <a:p>
+            <a:pPr algn="l"/>
+            <a:r>
+              <a:rPr sz="1600" b="1" i="0">
+                <a:solidFill>
+                  <a:srgbClr val="FFFFFF"/>
+                </a:solidFill>
+              </a:rPr>
+              <a:t>0단계</a:t>
+            </a:r>
+          </a:p>
+        </p:txBody>
+      </p:sp>
+      <p:sp>
+        <p:nvSpPr>
+          <p:cNvPr id="9" name="TextBox 8"/>
+          <p:cNvSpPr txBox="1"/>
+          <p:nvPr/>
+        </p:nvSpPr>
+        <p:spPr>
+          <a:xfrm>
+            <a:off x="1737360" y="1234440"/>
+            <a:ext cx="1188720" cy="274320"/>
+          </a:xfrm>
+          <a:prstGeom prst="rect">
+            <a:avLst/>
+          </a:prstGeom>
+          <a:noFill/>
+        </p:spPr>
+        <p:txBody>
+          <a:bodyPr wrap="square">
+            <a:spAutoFit/>
+          </a:bodyPr>
+          <a:lstStyle/>
+          <a:p>
+            <a:pPr algn="r"/>
+            <a:r>
+              <a:rPr sz="1200" b="0" i="0">
+                <a:solidFill>
+                  <a:srgbClr val="FFFFFF"/>
+                </a:solidFill>
+              </a:rPr>
+              <a:t>완료</a:t>
+            </a:r>
+          </a:p>
+        </p:txBody>
+      </p:sp>
+      <p:sp>
+        <p:nvSpPr>
+          <p:cNvPr id="10" name="Rectangle 9"/>
+          <p:cNvSpPr/>
+          <p:nvPr/>
+        </p:nvSpPr>
+        <p:spPr>
+          <a:xfrm>
+            <a:off x="274320" y="1792224"/>
+            <a:ext cx="2743200" cy="438912"/>
+          </a:xfrm>
+          <a:prstGeom prst="rect">
+            <a:avLst/>
+          </a:prstGeom>
+          <a:solidFill>
+            <a:srgbClr val="F4F5F7"/>
+          </a:solidFill>
+          <a:ln>
+            <a:noFill/>
+          </a:ln>
+        </p:spPr>
+        <p:style>
+          <a:lnRef idx="1">
+            <a:schemeClr val="accent1"/>
+          </a:lnRef>
+          <a:fillRef idx="3">
+            <a:schemeClr val="accent1"/>
+          </a:fillRef>
+          <a:effectRef idx="2">
+            <a:schemeClr val="accent1"/>
+          </a:effectRef>
+          <a:fontRef idx="minor">
+            <a:schemeClr val="lt1"/>
+          </a:fontRef>
+        </p:style>
+        <p:txBody>
+          <a:bodyPr rtlCol="0" anchor="ctr"/>
+          <a:lstStyle/>
+          <a:p>
+            <a:pPr algn="ctr"/>
+          </a:p>
+        </p:txBody>
+      </p:sp>
+      <p:sp>
+        <p:nvSpPr>
+          <p:cNvPr id="11" name="TextBox 10"/>
+          <p:cNvSpPr txBox="1"/>
+          <p:nvPr/>
+        </p:nvSpPr>
+        <p:spPr>
+          <a:xfrm>
+            <a:off x="384048" y="1828800"/>
+            <a:ext cx="2560320" cy="347472"/>
+          </a:xfrm>
+          <a:prstGeom prst="rect">
+            <a:avLst/>
+          </a:prstGeom>
+          <a:noFill/>
+        </p:spPr>
+        <p:txBody>
+          <a:bodyPr wrap="square">
+            <a:spAutoFit/>
+          </a:bodyPr>
+          <a:lstStyle/>
+          <a:p>
+            <a:pPr algn="l"/>
+            <a:r>
+              <a:rPr sz="1300" b="1" i="0">
+                <a:solidFill>
+                  <a:srgbClr val="F5A623"/>
+                </a:solidFill>
+              </a:rPr>
+              <a:t>RAG 문서 검색 (신규)</a:t>
+            </a:r>
+          </a:p>
+        </p:txBody>
+      </p:sp>
+      <p:sp>
+        <p:nvSpPr>
+          <p:cNvPr id="12" name="Rectangle 11"/>
+          <p:cNvSpPr/>
+          <p:nvPr/>
+        </p:nvSpPr>
+        <p:spPr>
+          <a:xfrm>
+            <a:off x="274320" y="2231136"/>
+            <a:ext cx="2743200" cy="2286000"/>
+          </a:xfrm>
+          <a:prstGeom prst="rect">
+            <a:avLst/>
+          </a:prstGeom>
+          <a:solidFill>
+            <a:srgbClr val="FFFFFF"/>
+          </a:solidFill>
+          <a:ln>
+            <a:noFill/>
+          </a:ln>
+        </p:spPr>
+        <p:style>
+          <a:lnRef idx="1">
+            <a:schemeClr val="accent1"/>
+          </a:lnRef>
+          <a:fillRef idx="3">
+            <a:schemeClr val="accent1"/>
+          </a:fillRef>
+          <a:effectRef idx="2">
+            <a:schemeClr val="accent1"/>
+          </a:effectRef>
+          <a:fontRef idx="minor">
+            <a:schemeClr val="lt1"/>
+          </a:fontRef>
+        </p:style>
+        <p:txBody>
+          <a:bodyPr rtlCol="0" anchor="ctr"/>
+          <a:lstStyle/>
+          <a:p>
+            <a:pPr algn="ctr"/>
+          </a:p>
+        </p:txBody>
+      </p:sp>
+      <p:sp>
+        <p:nvSpPr>
+          <p:cNvPr id="13" name="TextBox 12"/>
+          <p:cNvSpPr txBox="1"/>
+          <p:nvPr/>
+        </p:nvSpPr>
+        <p:spPr>
+          <a:xfrm>
+            <a:off x="411479" y="2304288"/>
+            <a:ext cx="2514600" cy="566928"/>
+          </a:xfrm>
+          <a:prstGeom prst="rect">
+            <a:avLst/>
+          </a:prstGeom>
+          <a:noFill/>
+        </p:spPr>
+        <p:txBody>
+          <a:bodyPr wrap="square">
+            <a:spAutoFit/>
+          </a:bodyPr>
+          <a:lstStyle/>
+          <a:p>
+            <a:pPr algn="l"/>
+            <a:r>
+              <a:rPr sz="1200" b="0" i="0">
+                <a:solidFill>
+                  <a:srgbClr val="1A1A2E"/>
+                </a:solidFill>
+              </a:rPr>
+              <a:t>▸  rag-service 모듈 + pgvector</a:t>
+            </a:r>
+          </a:p>
+        </p:txBody>
+      </p:sp>
+      <p:sp>
+        <p:nvSpPr>
+          <p:cNvPr id="14" name="TextBox 13"/>
+          <p:cNvSpPr txBox="1"/>
+          <p:nvPr/>
+        </p:nvSpPr>
+        <p:spPr>
+          <a:xfrm>
+            <a:off x="411479" y="2962656"/>
+            <a:ext cx="2514600" cy="566928"/>
+          </a:xfrm>
+          <a:prstGeom prst="rect">
+            <a:avLst/>
+          </a:prstGeom>
+          <a:noFill/>
+        </p:spPr>
+        <p:txBody>
+          <a:bodyPr wrap="square">
+            <a:spAutoFit/>
+          </a:bodyPr>
+          <a:lstStyle/>
+          <a:p>
+            <a:pPr algn="l"/>
+            <a:r>
+              <a:rPr sz="1200" b="0" i="0">
+                <a:solidFill>
+                  <a:srgbClr val="1A1A2E"/>
+                </a:solidFill>
+              </a:rPr>
+              <a:t>▸  로컬 통합 검증 완료(07-19)</a:t>
+            </a:r>
+          </a:p>
+        </p:txBody>
+      </p:sp>
+      <p:sp>
+        <p:nvSpPr>
+          <p:cNvPr id="15" name="TextBox 14"/>
+          <p:cNvSpPr txBox="1"/>
+          <p:nvPr/>
+        </p:nvSpPr>
+        <p:spPr>
+          <a:xfrm>
+            <a:off x="411479" y="3621024"/>
+            <a:ext cx="2514600" cy="566928"/>
+          </a:xfrm>
+          <a:prstGeom prst="rect">
+            <a:avLst/>
+          </a:prstGeom>
+          <a:noFill/>
+        </p:spPr>
+        <p:txBody>
+          <a:bodyPr wrap="square">
+            <a:spAutoFit/>
+          </a:bodyPr>
+          <a:lstStyle/>
+          <a:p>
+            <a:pPr algn="l"/>
+            <a:r>
+              <a:rPr sz="1200" b="0" i="0">
+                <a:solidFill>
+                  <a:srgbClr val="1A1A2E"/>
+                </a:solidFill>
+              </a:rPr>
+              <a:t>▸  → 운영(Railway) 반영은 다음 단계</a:t>
+            </a:r>
+          </a:p>
+        </p:txBody>
+      </p:sp>
+      <p:sp>
+        <p:nvSpPr>
+          <p:cNvPr id="16" name="Rectangle 15"/>
+          <p:cNvSpPr/>
+          <p:nvPr/>
+        </p:nvSpPr>
+        <p:spPr>
+          <a:xfrm>
+            <a:off x="3200400" y="1170432"/>
+            <a:ext cx="2743200" cy="621792"/>
           </a:xfrm>
           <a:prstGeom prst="rect">
             <a:avLst/>
@@ -13101,82 +13659,1144 @@
       </p:sp>
       <p:sp>
         <p:nvSpPr>
-          <p:cNvPr id="5" name="TextBox 4"/>
-          <p:cNvSpPr txBox="1"/>
-          <p:nvPr/>
-        </p:nvSpPr>
-        <p:spPr>
-          <a:xfrm>
-            <a:off x="731520" y="1554480"/>
-            <a:ext cx="10725912" cy="1005840"/>
-          </a:xfrm>
-          <a:prstGeom prst="rect">
-            <a:avLst/>
-          </a:prstGeom>
-          <a:noFill/>
-        </p:spPr>
-        <p:txBody>
-          <a:bodyPr wrap="square">
-            <a:spAutoFit/>
-          </a:bodyPr>
-          <a:lstStyle/>
-          <a:p>
-            <a:pPr algn="ctr"/>
-            <a:r>
-              <a:rPr sz="4600" b="1" i="0">
+          <p:cNvPr id="17" name="TextBox 16"/>
+          <p:cNvSpPr txBox="1"/>
+          <p:nvPr/>
+        </p:nvSpPr>
+        <p:spPr>
+          <a:xfrm>
+            <a:off x="3291840" y="1188720"/>
+            <a:ext cx="1371600" cy="320040"/>
+          </a:xfrm>
+          <a:prstGeom prst="rect">
+            <a:avLst/>
+          </a:prstGeom>
+          <a:noFill/>
+        </p:spPr>
+        <p:txBody>
+          <a:bodyPr wrap="square">
+            <a:spAutoFit/>
+          </a:bodyPr>
+          <a:lstStyle/>
+          <a:p>
+            <a:pPr algn="l"/>
+            <a:r>
+              <a:rPr sz="1600" b="1" i="0">
                 <a:solidFill>
                   <a:srgbClr val="FFFFFF"/>
                 </a:solidFill>
               </a:rPr>
-              <a:t>감사합니다</a:t>
-            </a:r>
-          </a:p>
-        </p:txBody>
-      </p:sp>
-      <p:sp>
-        <p:nvSpPr>
-          <p:cNvPr id="6" name="TextBox 5"/>
-          <p:cNvSpPr txBox="1"/>
-          <p:nvPr/>
-        </p:nvSpPr>
-        <p:spPr>
-          <a:xfrm>
-            <a:off x="731520" y="2514600"/>
-            <a:ext cx="10725912" cy="594360"/>
-          </a:xfrm>
-          <a:prstGeom prst="rect">
-            <a:avLst/>
-          </a:prstGeom>
-          <a:noFill/>
-        </p:spPr>
-        <p:txBody>
-          <a:bodyPr wrap="square">
-            <a:spAutoFit/>
-          </a:bodyPr>
-          <a:lstStyle/>
-          <a:p>
-            <a:pPr algn="ctr"/>
-            <a:r>
-              <a:rPr sz="2200" b="0" i="0">
-                <a:solidFill>
-                  <a:srgbClr val="90AACC"/>
-                </a:solidFill>
-              </a:rPr>
-              <a:t>Q &amp; A</a:t>
-            </a:r>
-          </a:p>
-        </p:txBody>
-      </p:sp>
-      <p:sp>
-        <p:nvSpPr>
-          <p:cNvPr id="7" name="Rectangle 6"/>
+              <a:t>1단계</a:t>
+            </a:r>
+          </a:p>
+        </p:txBody>
+      </p:sp>
+      <p:sp>
+        <p:nvSpPr>
+          <p:cNvPr id="18" name="TextBox 17"/>
+          <p:cNvSpPr txBox="1"/>
+          <p:nvPr/>
+        </p:nvSpPr>
+        <p:spPr>
+          <a:xfrm>
+            <a:off x="4663440" y="1234440"/>
+            <a:ext cx="1188720" cy="274320"/>
+          </a:xfrm>
+          <a:prstGeom prst="rect">
+            <a:avLst/>
+          </a:prstGeom>
+          <a:noFill/>
+        </p:spPr>
+        <p:txBody>
+          <a:bodyPr wrap="square">
+            <a:spAutoFit/>
+          </a:bodyPr>
+          <a:lstStyle/>
+          <a:p>
+            <a:pPr algn="r"/>
+            <a:r>
+              <a:rPr sz="1200" b="0" i="0">
+                <a:solidFill>
+                  <a:srgbClr val="FFFFFF"/>
+                </a:solidFill>
+              </a:rPr>
+              <a:t>2주</a:t>
+            </a:r>
+          </a:p>
+        </p:txBody>
+      </p:sp>
+      <p:sp>
+        <p:nvSpPr>
+          <p:cNvPr id="19" name="Rectangle 18"/>
           <p:cNvSpPr/>
           <p:nvPr/>
         </p:nvSpPr>
         <p:spPr>
           <a:xfrm>
-            <a:off x="3657600" y="3246120"/>
-            <a:ext cx="4873752" cy="45720"/>
+            <a:off x="3200400" y="1792224"/>
+            <a:ext cx="2743200" cy="438912"/>
+          </a:xfrm>
+          <a:prstGeom prst="rect">
+            <a:avLst/>
+          </a:prstGeom>
+          <a:solidFill>
+            <a:srgbClr val="F4F5F7"/>
+          </a:solidFill>
+          <a:ln>
+            <a:noFill/>
+          </a:ln>
+        </p:spPr>
+        <p:style>
+          <a:lnRef idx="1">
+            <a:schemeClr val="accent1"/>
+          </a:lnRef>
+          <a:fillRef idx="3">
+            <a:schemeClr val="accent1"/>
+          </a:fillRef>
+          <a:effectRef idx="2">
+            <a:schemeClr val="accent1"/>
+          </a:effectRef>
+          <a:fontRef idx="minor">
+            <a:schemeClr val="lt1"/>
+          </a:fontRef>
+        </p:style>
+        <p:txBody>
+          <a:bodyPr rtlCol="0" anchor="ctr"/>
+          <a:lstStyle/>
+          <a:p>
+            <a:pPr algn="ctr"/>
+          </a:p>
+        </p:txBody>
+      </p:sp>
+      <p:sp>
+        <p:nvSpPr>
+          <p:cNvPr id="20" name="TextBox 19"/>
+          <p:cNvSpPr txBox="1"/>
+          <p:nvPr/>
+        </p:nvSpPr>
+        <p:spPr>
+          <a:xfrm>
+            <a:off x="3310128" y="1828800"/>
+            <a:ext cx="2560320" cy="347472"/>
+          </a:xfrm>
+          <a:prstGeom prst="rect">
+            <a:avLst/>
+          </a:prstGeom>
+          <a:noFill/>
+        </p:spPr>
+        <p:txBody>
+          <a:bodyPr wrap="square">
+            <a:spAutoFit/>
+          </a:bodyPr>
+          <a:lstStyle/>
+          <a:p>
+            <a:pPr algn="l"/>
+            <a:r>
+              <a:rPr sz="1300" b="1" i="0">
+                <a:solidFill>
+                  <a:srgbClr val="E94560"/>
+                </a:solidFill>
+              </a:rPr>
+              <a:t>인증 &amp; 권한 관리</a:t>
+            </a:r>
+          </a:p>
+        </p:txBody>
+      </p:sp>
+      <p:sp>
+        <p:nvSpPr>
+          <p:cNvPr id="21" name="Rectangle 20"/>
+          <p:cNvSpPr/>
+          <p:nvPr/>
+        </p:nvSpPr>
+        <p:spPr>
+          <a:xfrm>
+            <a:off x="3200400" y="2231136"/>
+            <a:ext cx="2743200" cy="2286000"/>
+          </a:xfrm>
+          <a:prstGeom prst="rect">
+            <a:avLst/>
+          </a:prstGeom>
+          <a:solidFill>
+            <a:srgbClr val="FFFFFF"/>
+          </a:solidFill>
+          <a:ln>
+            <a:noFill/>
+          </a:ln>
+        </p:spPr>
+        <p:style>
+          <a:lnRef idx="1">
+            <a:schemeClr val="accent1"/>
+          </a:lnRef>
+          <a:fillRef idx="3">
+            <a:schemeClr val="accent1"/>
+          </a:fillRef>
+          <a:effectRef idx="2">
+            <a:schemeClr val="accent1"/>
+          </a:effectRef>
+          <a:fontRef idx="minor">
+            <a:schemeClr val="lt1"/>
+          </a:fontRef>
+        </p:style>
+        <p:txBody>
+          <a:bodyPr rtlCol="0" anchor="ctr"/>
+          <a:lstStyle/>
+          <a:p>
+            <a:pPr algn="ctr"/>
+          </a:p>
+        </p:txBody>
+      </p:sp>
+      <p:sp>
+        <p:nvSpPr>
+          <p:cNvPr id="22" name="TextBox 21"/>
+          <p:cNvSpPr txBox="1"/>
+          <p:nvPr/>
+        </p:nvSpPr>
+        <p:spPr>
+          <a:xfrm>
+            <a:off x="3337560" y="2304288"/>
+            <a:ext cx="2514600" cy="566928"/>
+          </a:xfrm>
+          <a:prstGeom prst="rect">
+            <a:avLst/>
+          </a:prstGeom>
+          <a:noFill/>
+        </p:spPr>
+        <p:txBody>
+          <a:bodyPr wrap="square">
+            <a:spAutoFit/>
+          </a:bodyPr>
+          <a:lstStyle/>
+          <a:p>
+            <a:pPr algn="l"/>
+            <a:r>
+              <a:rPr sz="1200" b="0" i="0">
+                <a:solidFill>
+                  <a:srgbClr val="1A1A2E"/>
+                </a:solidFill>
+              </a:rPr>
+              <a:t>▸  JWT 기반 로그인</a:t>
+            </a:r>
+          </a:p>
+        </p:txBody>
+      </p:sp>
+      <p:sp>
+        <p:nvSpPr>
+          <p:cNvPr id="23" name="TextBox 22"/>
+          <p:cNvSpPr txBox="1"/>
+          <p:nvPr/>
+        </p:nvSpPr>
+        <p:spPr>
+          <a:xfrm>
+            <a:off x="3337560" y="2962656"/>
+            <a:ext cx="2514600" cy="566928"/>
+          </a:xfrm>
+          <a:prstGeom prst="rect">
+            <a:avLst/>
+          </a:prstGeom>
+          <a:noFill/>
+        </p:spPr>
+        <p:txBody>
+          <a:bodyPr wrap="square">
+            <a:spAutoFit/>
+          </a:bodyPr>
+          <a:lstStyle/>
+          <a:p>
+            <a:pPr algn="l"/>
+            <a:r>
+              <a:rPr sz="1200" b="0" i="0">
+                <a:solidFill>
+                  <a:srgbClr val="1A1A2E"/>
+                </a:solidFill>
+              </a:rPr>
+              <a:t>▸  역할별 화면 접근 제어</a:t>
+            </a:r>
+          </a:p>
+        </p:txBody>
+      </p:sp>
+      <p:sp>
+        <p:nvSpPr>
+          <p:cNvPr id="24" name="TextBox 23"/>
+          <p:cNvSpPr txBox="1"/>
+          <p:nvPr/>
+        </p:nvSpPr>
+        <p:spPr>
+          <a:xfrm>
+            <a:off x="3337560" y="3621024"/>
+            <a:ext cx="2514600" cy="566928"/>
+          </a:xfrm>
+          <a:prstGeom prst="rect">
+            <a:avLst/>
+          </a:prstGeom>
+          <a:noFill/>
+        </p:spPr>
+        <p:txBody>
+          <a:bodyPr wrap="square">
+            <a:spAutoFit/>
+          </a:bodyPr>
+          <a:lstStyle/>
+          <a:p>
+            <a:pPr algn="l"/>
+            <a:r>
+              <a:rPr sz="1200" b="0" i="0">
+                <a:solidFill>
+                  <a:srgbClr val="1A1A2E"/>
+                </a:solidFill>
+              </a:rPr>
+              <a:t>▸  감사 로그 기록</a:t>
+            </a:r>
+          </a:p>
+        </p:txBody>
+      </p:sp>
+      <p:sp>
+        <p:nvSpPr>
+          <p:cNvPr id="25" name="Rectangle 24"/>
+          <p:cNvSpPr/>
+          <p:nvPr/>
+        </p:nvSpPr>
+        <p:spPr>
+          <a:xfrm>
+            <a:off x="6126480" y="1170432"/>
+            <a:ext cx="2743200" cy="621792"/>
+          </a:xfrm>
+          <a:prstGeom prst="rect">
+            <a:avLst/>
+          </a:prstGeom>
+          <a:solidFill>
+            <a:srgbClr val="0F3460"/>
+          </a:solidFill>
+          <a:ln>
+            <a:noFill/>
+          </a:ln>
+        </p:spPr>
+        <p:style>
+          <a:lnRef idx="1">
+            <a:schemeClr val="accent1"/>
+          </a:lnRef>
+          <a:fillRef idx="3">
+            <a:schemeClr val="accent1"/>
+          </a:fillRef>
+          <a:effectRef idx="2">
+            <a:schemeClr val="accent1"/>
+          </a:effectRef>
+          <a:fontRef idx="minor">
+            <a:schemeClr val="lt1"/>
+          </a:fontRef>
+        </p:style>
+        <p:txBody>
+          <a:bodyPr rtlCol="0" anchor="ctr"/>
+          <a:lstStyle/>
+          <a:p>
+            <a:pPr algn="ctr"/>
+          </a:p>
+        </p:txBody>
+      </p:sp>
+      <p:sp>
+        <p:nvSpPr>
+          <p:cNvPr id="26" name="TextBox 25"/>
+          <p:cNvSpPr txBox="1"/>
+          <p:nvPr/>
+        </p:nvSpPr>
+        <p:spPr>
+          <a:xfrm>
+            <a:off x="6217920" y="1188720"/>
+            <a:ext cx="1371600" cy="320040"/>
+          </a:xfrm>
+          <a:prstGeom prst="rect">
+            <a:avLst/>
+          </a:prstGeom>
+          <a:noFill/>
+        </p:spPr>
+        <p:txBody>
+          <a:bodyPr wrap="square">
+            <a:spAutoFit/>
+          </a:bodyPr>
+          <a:lstStyle/>
+          <a:p>
+            <a:pPr algn="l"/>
+            <a:r>
+              <a:rPr sz="1600" b="1" i="0">
+                <a:solidFill>
+                  <a:srgbClr val="FFFFFF"/>
+                </a:solidFill>
+              </a:rPr>
+              <a:t>2단계</a:t>
+            </a:r>
+          </a:p>
+        </p:txBody>
+      </p:sp>
+      <p:sp>
+        <p:nvSpPr>
+          <p:cNvPr id="27" name="TextBox 26"/>
+          <p:cNvSpPr txBox="1"/>
+          <p:nvPr/>
+        </p:nvSpPr>
+        <p:spPr>
+          <a:xfrm>
+            <a:off x="7589520" y="1234440"/>
+            <a:ext cx="1188720" cy="274320"/>
+          </a:xfrm>
+          <a:prstGeom prst="rect">
+            <a:avLst/>
+          </a:prstGeom>
+          <a:noFill/>
+        </p:spPr>
+        <p:txBody>
+          <a:bodyPr wrap="square">
+            <a:spAutoFit/>
+          </a:bodyPr>
+          <a:lstStyle/>
+          <a:p>
+            <a:pPr algn="r"/>
+            <a:r>
+              <a:rPr sz="1200" b="0" i="0">
+                <a:solidFill>
+                  <a:srgbClr val="FFFFFF"/>
+                </a:solidFill>
+              </a:rPr>
+              <a:t>4주</a:t>
+            </a:r>
+          </a:p>
+        </p:txBody>
+      </p:sp>
+      <p:sp>
+        <p:nvSpPr>
+          <p:cNvPr id="28" name="Rectangle 27"/>
+          <p:cNvSpPr/>
+          <p:nvPr/>
+        </p:nvSpPr>
+        <p:spPr>
+          <a:xfrm>
+            <a:off x="6126480" y="1792224"/>
+            <a:ext cx="2743200" cy="438912"/>
+          </a:xfrm>
+          <a:prstGeom prst="rect">
+            <a:avLst/>
+          </a:prstGeom>
+          <a:solidFill>
+            <a:srgbClr val="EEEEFF"/>
+          </a:solidFill>
+          <a:ln>
+            <a:noFill/>
+          </a:ln>
+        </p:spPr>
+        <p:style>
+          <a:lnRef idx="1">
+            <a:schemeClr val="accent1"/>
+          </a:lnRef>
+          <a:fillRef idx="3">
+            <a:schemeClr val="accent1"/>
+          </a:fillRef>
+          <a:effectRef idx="2">
+            <a:schemeClr val="accent1"/>
+          </a:effectRef>
+          <a:fontRef idx="minor">
+            <a:schemeClr val="lt1"/>
+          </a:fontRef>
+        </p:style>
+        <p:txBody>
+          <a:bodyPr rtlCol="0" anchor="ctr"/>
+          <a:lstStyle/>
+          <a:p>
+            <a:pPr algn="ctr"/>
+          </a:p>
+        </p:txBody>
+      </p:sp>
+      <p:sp>
+        <p:nvSpPr>
+          <p:cNvPr id="29" name="TextBox 28"/>
+          <p:cNvSpPr txBox="1"/>
+          <p:nvPr/>
+        </p:nvSpPr>
+        <p:spPr>
+          <a:xfrm>
+            <a:off x="6236208" y="1828800"/>
+            <a:ext cx="2560320" cy="347472"/>
+          </a:xfrm>
+          <a:prstGeom prst="rect">
+            <a:avLst/>
+          </a:prstGeom>
+          <a:noFill/>
+        </p:spPr>
+        <p:txBody>
+          <a:bodyPr wrap="square">
+            <a:spAutoFit/>
+          </a:bodyPr>
+          <a:lstStyle/>
+          <a:p>
+            <a:pPr algn="l"/>
+            <a:r>
+              <a:rPr sz="1300" b="1" i="0">
+                <a:solidFill>
+                  <a:srgbClr val="0F3460"/>
+                </a:solidFill>
+              </a:rPr>
+              <a:t>로컬 LLM 전환</a:t>
+            </a:r>
+          </a:p>
+        </p:txBody>
+      </p:sp>
+      <p:sp>
+        <p:nvSpPr>
+          <p:cNvPr id="30" name="Rectangle 29"/>
+          <p:cNvSpPr/>
+          <p:nvPr/>
+        </p:nvSpPr>
+        <p:spPr>
+          <a:xfrm>
+            <a:off x="6126480" y="2231136"/>
+            <a:ext cx="2743200" cy="2286000"/>
+          </a:xfrm>
+          <a:prstGeom prst="rect">
+            <a:avLst/>
+          </a:prstGeom>
+          <a:solidFill>
+            <a:srgbClr val="FFFFFF"/>
+          </a:solidFill>
+          <a:ln>
+            <a:noFill/>
+          </a:ln>
+        </p:spPr>
+        <p:style>
+          <a:lnRef idx="1">
+            <a:schemeClr val="accent1"/>
+          </a:lnRef>
+          <a:fillRef idx="3">
+            <a:schemeClr val="accent1"/>
+          </a:fillRef>
+          <a:effectRef idx="2">
+            <a:schemeClr val="accent1"/>
+          </a:effectRef>
+          <a:fontRef idx="minor">
+            <a:schemeClr val="lt1"/>
+          </a:fontRef>
+        </p:style>
+        <p:txBody>
+          <a:bodyPr rtlCol="0" anchor="ctr"/>
+          <a:lstStyle/>
+          <a:p>
+            <a:pPr algn="ctr"/>
+          </a:p>
+        </p:txBody>
+      </p:sp>
+      <p:sp>
+        <p:nvSpPr>
+          <p:cNvPr id="31" name="TextBox 30"/>
+          <p:cNvSpPr txBox="1"/>
+          <p:nvPr/>
+        </p:nvSpPr>
+        <p:spPr>
+          <a:xfrm>
+            <a:off x="6263640" y="2304288"/>
+            <a:ext cx="2514600" cy="566928"/>
+          </a:xfrm>
+          <a:prstGeom prst="rect">
+            <a:avLst/>
+          </a:prstGeom>
+          <a:noFill/>
+        </p:spPr>
+        <p:txBody>
+          <a:bodyPr wrap="square">
+            <a:spAutoFit/>
+          </a:bodyPr>
+          <a:lstStyle/>
+          <a:p>
+            <a:pPr algn="l"/>
+            <a:r>
+              <a:rPr sz="1200" b="0" i="0">
+                <a:solidFill>
+                  <a:srgbClr val="1A1A2E"/>
+                </a:solidFill>
+              </a:rPr>
+              <a:t>▸  vLLM + Qwen2.5-14B</a:t>
+            </a:r>
+          </a:p>
+        </p:txBody>
+      </p:sp>
+      <p:sp>
+        <p:nvSpPr>
+          <p:cNvPr id="32" name="TextBox 31"/>
+          <p:cNvSpPr txBox="1"/>
+          <p:nvPr/>
+        </p:nvSpPr>
+        <p:spPr>
+          <a:xfrm>
+            <a:off x="6263640" y="2962656"/>
+            <a:ext cx="2514600" cy="566928"/>
+          </a:xfrm>
+          <a:prstGeom prst="rect">
+            <a:avLst/>
+          </a:prstGeom>
+          <a:noFill/>
+        </p:spPr>
+        <p:txBody>
+          <a:bodyPr wrap="square">
+            <a:spAutoFit/>
+          </a:bodyPr>
+          <a:lstStyle/>
+          <a:p>
+            <a:pPr algn="l"/>
+            <a:r>
+              <a:rPr sz="1200" b="0" i="0">
+                <a:solidFill>
+                  <a:srgbClr val="1A1A2E"/>
+                </a:solidFill>
+              </a:rPr>
+              <a:t>▸  내부 GPU 서버 구축</a:t>
+            </a:r>
+          </a:p>
+        </p:txBody>
+      </p:sp>
+      <p:sp>
+        <p:nvSpPr>
+          <p:cNvPr id="33" name="TextBox 32"/>
+          <p:cNvSpPr txBox="1"/>
+          <p:nvPr/>
+        </p:nvSpPr>
+        <p:spPr>
+          <a:xfrm>
+            <a:off x="6263640" y="3621024"/>
+            <a:ext cx="2514600" cy="566928"/>
+          </a:xfrm>
+          <a:prstGeom prst="rect">
+            <a:avLst/>
+          </a:prstGeom>
+          <a:noFill/>
+        </p:spPr>
+        <p:txBody>
+          <a:bodyPr wrap="square">
+            <a:spAutoFit/>
+          </a:bodyPr>
+          <a:lstStyle/>
+          <a:p>
+            <a:pPr algn="l"/>
+            <a:r>
+              <a:rPr sz="1200" b="0" i="0">
+                <a:solidFill>
+                  <a:srgbClr val="1A1A2E"/>
+                </a:solidFill>
+              </a:rPr>
+              <a:t>▸  외부망 완전 차단 운영</a:t>
+            </a:r>
+          </a:p>
+        </p:txBody>
+      </p:sp>
+      <p:sp>
+        <p:nvSpPr>
+          <p:cNvPr id="34" name="Rectangle 33"/>
+          <p:cNvSpPr/>
+          <p:nvPr/>
+        </p:nvSpPr>
+        <p:spPr>
+          <a:xfrm>
+            <a:off x="9052560" y="1170432"/>
+            <a:ext cx="2743200" cy="621792"/>
+          </a:xfrm>
+          <a:prstGeom prst="rect">
+            <a:avLst/>
+          </a:prstGeom>
+          <a:solidFill>
+            <a:srgbClr val="1A1A2E"/>
+          </a:solidFill>
+          <a:ln>
+            <a:noFill/>
+          </a:ln>
+        </p:spPr>
+        <p:style>
+          <a:lnRef idx="1">
+            <a:schemeClr val="accent1"/>
+          </a:lnRef>
+          <a:fillRef idx="3">
+            <a:schemeClr val="accent1"/>
+          </a:fillRef>
+          <a:effectRef idx="2">
+            <a:schemeClr val="accent1"/>
+          </a:effectRef>
+          <a:fontRef idx="minor">
+            <a:schemeClr val="lt1"/>
+          </a:fontRef>
+        </p:style>
+        <p:txBody>
+          <a:bodyPr rtlCol="0" anchor="ctr"/>
+          <a:lstStyle/>
+          <a:p>
+            <a:pPr algn="ctr"/>
+          </a:p>
+        </p:txBody>
+      </p:sp>
+      <p:sp>
+        <p:nvSpPr>
+          <p:cNvPr id="35" name="TextBox 34"/>
+          <p:cNvSpPr txBox="1"/>
+          <p:nvPr/>
+        </p:nvSpPr>
+        <p:spPr>
+          <a:xfrm>
+            <a:off x="9144000" y="1188720"/>
+            <a:ext cx="1371600" cy="320040"/>
+          </a:xfrm>
+          <a:prstGeom prst="rect">
+            <a:avLst/>
+          </a:prstGeom>
+          <a:noFill/>
+        </p:spPr>
+        <p:txBody>
+          <a:bodyPr wrap="square">
+            <a:spAutoFit/>
+          </a:bodyPr>
+          <a:lstStyle/>
+          <a:p>
+            <a:pPr algn="l"/>
+            <a:r>
+              <a:rPr sz="1600" b="1" i="0">
+                <a:solidFill>
+                  <a:srgbClr val="FFFFFF"/>
+                </a:solidFill>
+              </a:rPr>
+              <a:t>3단계</a:t>
+            </a:r>
+          </a:p>
+        </p:txBody>
+      </p:sp>
+      <p:sp>
+        <p:nvSpPr>
+          <p:cNvPr id="36" name="TextBox 35"/>
+          <p:cNvSpPr txBox="1"/>
+          <p:nvPr/>
+        </p:nvSpPr>
+        <p:spPr>
+          <a:xfrm>
+            <a:off x="10515600" y="1234440"/>
+            <a:ext cx="1188720" cy="274320"/>
+          </a:xfrm>
+          <a:prstGeom prst="rect">
+            <a:avLst/>
+          </a:prstGeom>
+          <a:noFill/>
+        </p:spPr>
+        <p:txBody>
+          <a:bodyPr wrap="square">
+            <a:spAutoFit/>
+          </a:bodyPr>
+          <a:lstStyle/>
+          <a:p>
+            <a:pPr algn="r"/>
+            <a:r>
+              <a:rPr sz="1200" b="0" i="0">
+                <a:solidFill>
+                  <a:srgbClr val="FFFFFF"/>
+                </a:solidFill>
+              </a:rPr>
+              <a:t>3주</a:t>
+            </a:r>
+          </a:p>
+        </p:txBody>
+      </p:sp>
+      <p:sp>
+        <p:nvSpPr>
+          <p:cNvPr id="37" name="Rectangle 36"/>
+          <p:cNvSpPr/>
+          <p:nvPr/>
+        </p:nvSpPr>
+        <p:spPr>
+          <a:xfrm>
+            <a:off x="9052560" y="1792224"/>
+            <a:ext cx="2743200" cy="438912"/>
+          </a:xfrm>
+          <a:prstGeom prst="rect">
+            <a:avLst/>
+          </a:prstGeom>
+          <a:solidFill>
+            <a:srgbClr val="F4F5F7"/>
+          </a:solidFill>
+          <a:ln>
+            <a:noFill/>
+          </a:ln>
+        </p:spPr>
+        <p:style>
+          <a:lnRef idx="1">
+            <a:schemeClr val="accent1"/>
+          </a:lnRef>
+          <a:fillRef idx="3">
+            <a:schemeClr val="accent1"/>
+          </a:fillRef>
+          <a:effectRef idx="2">
+            <a:schemeClr val="accent1"/>
+          </a:effectRef>
+          <a:fontRef idx="minor">
+            <a:schemeClr val="lt1"/>
+          </a:fontRef>
+        </p:style>
+        <p:txBody>
+          <a:bodyPr rtlCol="0" anchor="ctr"/>
+          <a:lstStyle/>
+          <a:p>
+            <a:pPr algn="ctr"/>
+          </a:p>
+        </p:txBody>
+      </p:sp>
+      <p:sp>
+        <p:nvSpPr>
+          <p:cNvPr id="38" name="TextBox 37"/>
+          <p:cNvSpPr txBox="1"/>
+          <p:nvPr/>
+        </p:nvSpPr>
+        <p:spPr>
+          <a:xfrm>
+            <a:off x="9162288" y="1828800"/>
+            <a:ext cx="2560320" cy="347472"/>
+          </a:xfrm>
+          <a:prstGeom prst="rect">
+            <a:avLst/>
+          </a:prstGeom>
+          <a:noFill/>
+        </p:spPr>
+        <p:txBody>
+          <a:bodyPr wrap="square">
+            <a:spAutoFit/>
+          </a:bodyPr>
+          <a:lstStyle/>
+          <a:p>
+            <a:pPr algn="l"/>
+            <a:r>
+              <a:rPr sz="1300" b="1" i="0">
+                <a:solidFill>
+                  <a:srgbClr val="1A1A2E"/>
+                </a:solidFill>
+              </a:rPr>
+              <a:t>실시간 MES 연동</a:t>
+            </a:r>
+          </a:p>
+        </p:txBody>
+      </p:sp>
+      <p:sp>
+        <p:nvSpPr>
+          <p:cNvPr id="39" name="Rectangle 38"/>
+          <p:cNvSpPr/>
+          <p:nvPr/>
+        </p:nvSpPr>
+        <p:spPr>
+          <a:xfrm>
+            <a:off x="9052560" y="2231136"/>
+            <a:ext cx="2743200" cy="2286000"/>
+          </a:xfrm>
+          <a:prstGeom prst="rect">
+            <a:avLst/>
+          </a:prstGeom>
+          <a:solidFill>
+            <a:srgbClr val="FFFFFF"/>
+          </a:solidFill>
+          <a:ln>
+            <a:noFill/>
+          </a:ln>
+        </p:spPr>
+        <p:style>
+          <a:lnRef idx="1">
+            <a:schemeClr val="accent1"/>
+          </a:lnRef>
+          <a:fillRef idx="3">
+            <a:schemeClr val="accent1"/>
+          </a:fillRef>
+          <a:effectRef idx="2">
+            <a:schemeClr val="accent1"/>
+          </a:effectRef>
+          <a:fontRef idx="minor">
+            <a:schemeClr val="lt1"/>
+          </a:fontRef>
+        </p:style>
+        <p:txBody>
+          <a:bodyPr rtlCol="0" anchor="ctr"/>
+          <a:lstStyle/>
+          <a:p>
+            <a:pPr algn="ctr"/>
+          </a:p>
+        </p:txBody>
+      </p:sp>
+      <p:sp>
+        <p:nvSpPr>
+          <p:cNvPr id="40" name="TextBox 39"/>
+          <p:cNvSpPr txBox="1"/>
+          <p:nvPr/>
+        </p:nvSpPr>
+        <p:spPr>
+          <a:xfrm>
+            <a:off x="9189720" y="2304288"/>
+            <a:ext cx="2514600" cy="566928"/>
+          </a:xfrm>
+          <a:prstGeom prst="rect">
+            <a:avLst/>
+          </a:prstGeom>
+          <a:noFill/>
+        </p:spPr>
+        <p:txBody>
+          <a:bodyPr wrap="square">
+            <a:spAutoFit/>
+          </a:bodyPr>
+          <a:lstStyle/>
+          <a:p>
+            <a:pPr algn="l"/>
+            <a:r>
+              <a:rPr sz="1200" b="0" i="0">
+                <a:solidFill>
+                  <a:srgbClr val="1A1A2E"/>
+                </a:solidFill>
+              </a:rPr>
+              <a:t>▸  CDC (Debezium+Kafka)</a:t>
+            </a:r>
+          </a:p>
+        </p:txBody>
+      </p:sp>
+      <p:sp>
+        <p:nvSpPr>
+          <p:cNvPr id="41" name="TextBox 40"/>
+          <p:cNvSpPr txBox="1"/>
+          <p:nvPr/>
+        </p:nvSpPr>
+        <p:spPr>
+          <a:xfrm>
+            <a:off x="9189720" y="2962656"/>
+            <a:ext cx="2514600" cy="566928"/>
+          </a:xfrm>
+          <a:prstGeom prst="rect">
+            <a:avLst/>
+          </a:prstGeom>
+          <a:noFill/>
+        </p:spPr>
+        <p:txBody>
+          <a:bodyPr wrap="square">
+            <a:spAutoFit/>
+          </a:bodyPr>
+          <a:lstStyle/>
+          <a:p>
+            <a:pPr algn="l"/>
+            <a:r>
+              <a:rPr sz="1200" b="0" i="0">
+                <a:solidFill>
+                  <a:srgbClr val="1A1A2E"/>
+                </a:solidFill>
+              </a:rPr>
+              <a:t>▸  WebSocket 실시간 차트</a:t>
+            </a:r>
+          </a:p>
+        </p:txBody>
+      </p:sp>
+      <p:sp>
+        <p:nvSpPr>
+          <p:cNvPr id="42" name="TextBox 41"/>
+          <p:cNvSpPr txBox="1"/>
+          <p:nvPr/>
+        </p:nvSpPr>
+        <p:spPr>
+          <a:xfrm>
+            <a:off x="9189720" y="3621024"/>
+            <a:ext cx="2514600" cy="566928"/>
+          </a:xfrm>
+          <a:prstGeom prst="rect">
+            <a:avLst/>
+          </a:prstGeom>
+          <a:noFill/>
+        </p:spPr>
+        <p:txBody>
+          <a:bodyPr wrap="square">
+            <a:spAutoFit/>
+          </a:bodyPr>
+          <a:lstStyle/>
+          <a:p>
+            <a:pPr algn="l"/>
+            <a:r>
+              <a:rPr sz="1200" b="0" i="0">
+                <a:solidFill>
+                  <a:srgbClr val="1A1A2E"/>
+                </a:solidFill>
+              </a:rPr>
+              <a:t>▸  수율 알림 경보</a:t>
+            </a:r>
+          </a:p>
+        </p:txBody>
+      </p:sp>
+      <p:sp>
+        <p:nvSpPr>
+          <p:cNvPr id="43" name="Rectangle 42"/>
+          <p:cNvSpPr/>
+          <p:nvPr/>
+        </p:nvSpPr>
+        <p:spPr>
+          <a:xfrm>
+            <a:off x="274320" y="4663440"/>
+            <a:ext cx="11640312" cy="1234440"/>
+          </a:xfrm>
+          <a:prstGeom prst="rect">
+            <a:avLst/>
+          </a:prstGeom>
+          <a:solidFill>
+            <a:srgbClr val="F5A623"/>
+          </a:solidFill>
+          <a:ln>
+            <a:noFill/>
+          </a:ln>
+        </p:spPr>
+        <p:style>
+          <a:lnRef idx="1">
+            <a:schemeClr val="accent1"/>
+          </a:lnRef>
+          <a:fillRef idx="3">
+            <a:schemeClr val="accent1"/>
+          </a:fillRef>
+          <a:effectRef idx="2">
+            <a:schemeClr val="accent1"/>
+          </a:effectRef>
+          <a:fontRef idx="minor">
+            <a:schemeClr val="lt1"/>
+          </a:fontRef>
+        </p:style>
+        <p:txBody>
+          <a:bodyPr rtlCol="0" anchor="ctr"/>
+          <a:lstStyle/>
+          <a:p>
+            <a:pPr algn="ctr"/>
+          </a:p>
+        </p:txBody>
+      </p:sp>
+      <p:sp>
+        <p:nvSpPr>
+          <p:cNvPr id="44" name="TextBox 43"/>
+          <p:cNvSpPr txBox="1"/>
+          <p:nvPr/>
+        </p:nvSpPr>
+        <p:spPr>
+          <a:xfrm>
+            <a:off x="457200" y="4709160"/>
+            <a:ext cx="11247120" cy="411480"/>
+          </a:xfrm>
+          <a:prstGeom prst="rect">
+            <a:avLst/>
+          </a:prstGeom>
+          <a:noFill/>
+        </p:spPr>
+        <p:txBody>
+          <a:bodyPr wrap="square">
+            <a:spAutoFit/>
+          </a:bodyPr>
+          <a:lstStyle/>
+          <a:p>
+            <a:pPr algn="l"/>
+            <a:r>
+              <a:rPr sz="1500" b="1" i="0">
+                <a:solidFill>
+                  <a:srgbClr val="1A1A2E"/>
+                </a:solidFill>
+              </a:rPr>
+              <a:t>핵심: 로컬 LLM 전환 (2단계)</a:t>
+            </a:r>
+          </a:p>
+        </p:txBody>
+      </p:sp>
+      <p:sp>
+        <p:nvSpPr>
+          <p:cNvPr id="45" name="TextBox 44"/>
+          <p:cNvSpPr txBox="1"/>
+          <p:nvPr/>
+        </p:nvSpPr>
+        <p:spPr>
+          <a:xfrm>
+            <a:off x="457200" y="5102352"/>
+            <a:ext cx="11247120" cy="749808"/>
+          </a:xfrm>
+          <a:prstGeom prst="rect">
+            <a:avLst/>
+          </a:prstGeom>
+          <a:noFill/>
+        </p:spPr>
+        <p:txBody>
+          <a:bodyPr wrap="square">
+            <a:spAutoFit/>
+          </a:bodyPr>
+          <a:lstStyle/>
+          <a:p>
+            <a:pPr algn="l"/>
+            <a:r>
+              <a:rPr sz="1200" b="0" i="0">
+                <a:solidFill>
+                  <a:srgbClr val="1A1A2E"/>
+                </a:solidFill>
+              </a:rPr>
+              <a:t>현재 Claude API  →  내부 GPU 서버 + Qwen2.5-14B (또는 Llama 3.3-70B)
+데이터가 외부로 전송되지 않아 사내 보안 정책 완전 준수  |  파운드리 공정 데이터 완전 내부 보관
+코드 변경 최소화:  application.yml URL·모델명 변경 + local-llm.enabled=true 로 전환 완료</a:t>
+            </a:r>
+          </a:p>
+        </p:txBody>
+      </p:sp>
+    </p:spTree>
+  </p:cSld>
+  <p:clrMapOvr>
+    <a:masterClrMapping/>
+  </p:clrMapOvr>
+</p:sld>
+</file>
+
+<file path=ppt/slides/slide16.xml><?xml version="1.0" encoding="utf-8"?>
+<p:sld xmlns:a="http://schemas.openxmlformats.org/drawingml/2006/main" xmlns:p="http://schemas.openxmlformats.org/presentationml/2006/main" xmlns:r="http://schemas.openxmlformats.org/officeDocument/2006/relationships">
+  <p:cSld>
+    <p:spTree>
+      <p:nvGrpSpPr>
+        <p:cNvPr id="1" name=""/>
+        <p:cNvGrpSpPr/>
+        <p:nvPr/>
+      </p:nvGrpSpPr>
+      <p:grpSpPr/>
+      <p:sp>
+        <p:nvSpPr>
+          <p:cNvPr id="2" name="Rectangle 1"/>
+          <p:cNvSpPr/>
+          <p:nvPr/>
+        </p:nvSpPr>
+        <p:spPr>
+          <a:xfrm>
+            <a:off x="0" y="0"/>
+            <a:ext cx="12188952" cy="6858000"/>
+          </a:xfrm>
+          <a:prstGeom prst="rect">
+            <a:avLst/>
+          </a:prstGeom>
+          <a:solidFill>
+            <a:srgbClr val="1A1A2E"/>
+          </a:solidFill>
+          <a:ln>
+            <a:noFill/>
+          </a:ln>
+        </p:spPr>
+        <p:style>
+          <a:lnRef idx="1">
+            <a:schemeClr val="accent1"/>
+          </a:lnRef>
+          <a:fillRef idx="3">
+            <a:schemeClr val="accent1"/>
+          </a:fillRef>
+          <a:effectRef idx="2">
+            <a:schemeClr val="accent1"/>
+          </a:effectRef>
+          <a:fontRef idx="minor">
+            <a:schemeClr val="lt1"/>
+          </a:fontRef>
+        </p:style>
+        <p:txBody>
+          <a:bodyPr rtlCol="0" anchor="ctr"/>
+          <a:lstStyle/>
+          <a:p>
+            <a:pPr algn="ctr"/>
+          </a:p>
+        </p:txBody>
+      </p:sp>
+      <p:sp>
+        <p:nvSpPr>
+          <p:cNvPr id="3" name="Rectangle 2"/>
+          <p:cNvSpPr/>
+          <p:nvPr/>
+        </p:nvSpPr>
+        <p:spPr>
+          <a:xfrm>
+            <a:off x="0" y="0"/>
+            <a:ext cx="12188952" cy="64008"/>
           </a:xfrm>
           <a:prstGeom prst="rect">
             <a:avLst/>
@@ -13212,6 +14832,160 @@
       </p:sp>
       <p:sp>
         <p:nvSpPr>
+          <p:cNvPr id="4" name="Rectangle 3"/>
+          <p:cNvSpPr/>
+          <p:nvPr/>
+        </p:nvSpPr>
+        <p:spPr>
+          <a:xfrm>
+            <a:off x="0" y="6793992"/>
+            <a:ext cx="12188952" cy="64008"/>
+          </a:xfrm>
+          <a:prstGeom prst="rect">
+            <a:avLst/>
+          </a:prstGeom>
+          <a:solidFill>
+            <a:srgbClr val="E94560"/>
+          </a:solidFill>
+          <a:ln>
+            <a:noFill/>
+          </a:ln>
+        </p:spPr>
+        <p:style>
+          <a:lnRef idx="1">
+            <a:schemeClr val="accent1"/>
+          </a:lnRef>
+          <a:fillRef idx="3">
+            <a:schemeClr val="accent1"/>
+          </a:fillRef>
+          <a:effectRef idx="2">
+            <a:schemeClr val="accent1"/>
+          </a:effectRef>
+          <a:fontRef idx="minor">
+            <a:schemeClr val="lt1"/>
+          </a:fontRef>
+        </p:style>
+        <p:txBody>
+          <a:bodyPr rtlCol="0" anchor="ctr"/>
+          <a:lstStyle/>
+          <a:p>
+            <a:pPr algn="ctr"/>
+          </a:p>
+        </p:txBody>
+      </p:sp>
+      <p:sp>
+        <p:nvSpPr>
+          <p:cNvPr id="5" name="TextBox 4"/>
+          <p:cNvSpPr txBox="1"/>
+          <p:nvPr/>
+        </p:nvSpPr>
+        <p:spPr>
+          <a:xfrm>
+            <a:off x="731520" y="1554480"/>
+            <a:ext cx="10725912" cy="1005840"/>
+          </a:xfrm>
+          <a:prstGeom prst="rect">
+            <a:avLst/>
+          </a:prstGeom>
+          <a:noFill/>
+        </p:spPr>
+        <p:txBody>
+          <a:bodyPr wrap="square">
+            <a:spAutoFit/>
+          </a:bodyPr>
+          <a:lstStyle/>
+          <a:p>
+            <a:pPr algn="ctr"/>
+            <a:r>
+              <a:rPr sz="4600" b="1" i="0">
+                <a:solidFill>
+                  <a:srgbClr val="FFFFFF"/>
+                </a:solidFill>
+              </a:rPr>
+              <a:t>감사합니다</a:t>
+            </a:r>
+          </a:p>
+        </p:txBody>
+      </p:sp>
+      <p:sp>
+        <p:nvSpPr>
+          <p:cNvPr id="6" name="TextBox 5"/>
+          <p:cNvSpPr txBox="1"/>
+          <p:nvPr/>
+        </p:nvSpPr>
+        <p:spPr>
+          <a:xfrm>
+            <a:off x="731520" y="2514600"/>
+            <a:ext cx="10725912" cy="594360"/>
+          </a:xfrm>
+          <a:prstGeom prst="rect">
+            <a:avLst/>
+          </a:prstGeom>
+          <a:noFill/>
+        </p:spPr>
+        <p:txBody>
+          <a:bodyPr wrap="square">
+            <a:spAutoFit/>
+          </a:bodyPr>
+          <a:lstStyle/>
+          <a:p>
+            <a:pPr algn="ctr"/>
+            <a:r>
+              <a:rPr sz="2200" b="0" i="0">
+                <a:solidFill>
+                  <a:srgbClr val="90AACC"/>
+                </a:solidFill>
+              </a:rPr>
+              <a:t>Q &amp; A</a:t>
+            </a:r>
+          </a:p>
+        </p:txBody>
+      </p:sp>
+      <p:sp>
+        <p:nvSpPr>
+          <p:cNvPr id="7" name="Rectangle 6"/>
+          <p:cNvSpPr/>
+          <p:nvPr/>
+        </p:nvSpPr>
+        <p:spPr>
+          <a:xfrm>
+            <a:off x="3657600" y="3246120"/>
+            <a:ext cx="4873752" cy="45720"/>
+          </a:xfrm>
+          <a:prstGeom prst="rect">
+            <a:avLst/>
+          </a:prstGeom>
+          <a:solidFill>
+            <a:srgbClr val="E94560"/>
+          </a:solidFill>
+          <a:ln>
+            <a:noFill/>
+          </a:ln>
+        </p:spPr>
+        <p:style>
+          <a:lnRef idx="1">
+            <a:schemeClr val="accent1"/>
+          </a:lnRef>
+          <a:fillRef idx="3">
+            <a:schemeClr val="accent1"/>
+          </a:fillRef>
+          <a:effectRef idx="2">
+            <a:schemeClr val="accent1"/>
+          </a:effectRef>
+          <a:fontRef idx="minor">
+            <a:schemeClr val="lt1"/>
+          </a:fontRef>
+        </p:style>
+        <p:txBody>
+          <a:bodyPr rtlCol="0" anchor="ctr"/>
+          <a:lstStyle/>
+          <a:p>
+            <a:pPr algn="ctr"/>
+          </a:p>
+        </p:txBody>
+      </p:sp>
+      <p:sp>
+        <p:nvSpPr>
           <p:cNvPr id="8" name="TextBox 7"/>
           <p:cNvSpPr txBox="1"/>
           <p:nvPr/>
@@ -13554,7 +15328,7 @@
                   <a:srgbClr val="AABBCC"/>
                 </a:solidFill>
               </a:rPr>
-              <a:t>산출물:  specification.md  |  specification_enterprise.md  |  postgresql_setup_guide.md  |  presentation.pptx</a:t>
+              <a:t>산출물:  specification.md  |  specification_enterprise.md  |  postgresql_setup_guide.md  |  presentation.pptx  |  foundry-ai-proposal.pdf</a:t>
             </a:r>
           </a:p>
         </p:txBody>
@@ -13782,7 +15556,7 @@
         </p:nvSpPr>
         <p:spPr>
           <a:xfrm>
-            <a:off x="411480" y="1188720"/>
+            <a:off x="411480" y="1097280"/>
             <a:ext cx="594360" cy="658368"/>
           </a:xfrm>
           <a:prstGeom prst="rect">
@@ -13825,7 +15599,7 @@
         </p:nvSpPr>
         <p:spPr>
           <a:xfrm>
-            <a:off x="411480" y="1280160"/>
+            <a:off x="411480" y="1188720"/>
             <a:ext cx="594360" cy="475488"/>
           </a:xfrm>
           <a:prstGeom prst="rect">
@@ -13859,7 +15633,7 @@
         </p:nvSpPr>
         <p:spPr>
           <a:xfrm>
-            <a:off x="1005840" y="1188720"/>
+            <a:off x="1005840" y="1097280"/>
             <a:ext cx="5029200" cy="658368"/>
           </a:xfrm>
           <a:prstGeom prst="rect">
@@ -13902,7 +15676,7 @@
         </p:nvSpPr>
         <p:spPr>
           <a:xfrm>
-            <a:off x="1143000" y="1344168"/>
+            <a:off x="1143000" y="1252728"/>
             <a:ext cx="4754880" cy="411480"/>
           </a:xfrm>
           <a:prstGeom prst="rect">
@@ -13936,7 +15710,7 @@
         </p:nvSpPr>
         <p:spPr>
           <a:xfrm>
-            <a:off x="411480" y="2084832"/>
+            <a:off x="411480" y="1883664"/>
             <a:ext cx="594360" cy="658368"/>
           </a:xfrm>
           <a:prstGeom prst="rect">
@@ -13979,7 +15753,7 @@
         </p:nvSpPr>
         <p:spPr>
           <a:xfrm>
-            <a:off x="411480" y="2176272"/>
+            <a:off x="411480" y="1975104"/>
             <a:ext cx="594360" cy="475488"/>
           </a:xfrm>
           <a:prstGeom prst="rect">
@@ -14013,7 +15787,7 @@
         </p:nvSpPr>
         <p:spPr>
           <a:xfrm>
-            <a:off x="1005840" y="2084832"/>
+            <a:off x="1005840" y="1883664"/>
             <a:ext cx="5029200" cy="658368"/>
           </a:xfrm>
           <a:prstGeom prst="rect">
@@ -14056,7 +15830,7 @@
         </p:nvSpPr>
         <p:spPr>
           <a:xfrm>
-            <a:off x="1143000" y="2240280"/>
+            <a:off x="1143000" y="2039112"/>
             <a:ext cx="4754880" cy="411480"/>
           </a:xfrm>
           <a:prstGeom prst="rect">
@@ -14090,7 +15864,7 @@
         </p:nvSpPr>
         <p:spPr>
           <a:xfrm>
-            <a:off x="411480" y="2980944"/>
+            <a:off x="411480" y="2670048"/>
             <a:ext cx="594360" cy="658368"/>
           </a:xfrm>
           <a:prstGeom prst="rect">
@@ -14133,7 +15907,7 @@
         </p:nvSpPr>
         <p:spPr>
           <a:xfrm>
-            <a:off x="411480" y="3072384"/>
+            <a:off x="411480" y="2761488"/>
             <a:ext cx="594360" cy="475488"/>
           </a:xfrm>
           <a:prstGeom prst="rect">
@@ -14167,7 +15941,7 @@
         </p:nvSpPr>
         <p:spPr>
           <a:xfrm>
-            <a:off x="1005840" y="2980944"/>
+            <a:off x="1005840" y="2670048"/>
             <a:ext cx="5029200" cy="658368"/>
           </a:xfrm>
           <a:prstGeom prst="rect">
@@ -14210,7 +15984,7 @@
         </p:nvSpPr>
         <p:spPr>
           <a:xfrm>
-            <a:off x="1143000" y="3136391"/>
+            <a:off x="1143000" y="2825496"/>
             <a:ext cx="4754880" cy="411480"/>
           </a:xfrm>
           <a:prstGeom prst="rect">
@@ -14244,7 +16018,7 @@
         </p:nvSpPr>
         <p:spPr>
           <a:xfrm>
-            <a:off x="411480" y="3877056"/>
+            <a:off x="411480" y="3456432"/>
             <a:ext cx="594360" cy="658368"/>
           </a:xfrm>
           <a:prstGeom prst="rect">
@@ -14287,7 +16061,7 @@
         </p:nvSpPr>
         <p:spPr>
           <a:xfrm>
-            <a:off x="411480" y="3968496"/>
+            <a:off x="411480" y="3547872"/>
             <a:ext cx="594360" cy="475488"/>
           </a:xfrm>
           <a:prstGeom prst="rect">
@@ -14321,7 +16095,7 @@
         </p:nvSpPr>
         <p:spPr>
           <a:xfrm>
-            <a:off x="1005840" y="3877056"/>
+            <a:off x="1005840" y="3456432"/>
             <a:ext cx="5029200" cy="658368"/>
           </a:xfrm>
           <a:prstGeom prst="rect">
@@ -14364,7 +16138,7 @@
         </p:nvSpPr>
         <p:spPr>
           <a:xfrm>
-            <a:off x="1143000" y="4032504"/>
+            <a:off x="1143000" y="3611880"/>
             <a:ext cx="4754880" cy="411480"/>
           </a:xfrm>
           <a:prstGeom prst="rect">
@@ -14398,7 +16172,7 @@
         </p:nvSpPr>
         <p:spPr>
           <a:xfrm>
-            <a:off x="411480" y="4773168"/>
+            <a:off x="411480" y="4242816"/>
             <a:ext cx="594360" cy="658368"/>
           </a:xfrm>
           <a:prstGeom prst="rect">
@@ -14441,7 +16215,7 @@
         </p:nvSpPr>
         <p:spPr>
           <a:xfrm>
-            <a:off x="411480" y="4864607"/>
+            <a:off x="411480" y="4334255"/>
             <a:ext cx="594360" cy="475488"/>
           </a:xfrm>
           <a:prstGeom prst="rect">
@@ -14475,7 +16249,7 @@
         </p:nvSpPr>
         <p:spPr>
           <a:xfrm>
-            <a:off x="1005840" y="4773168"/>
+            <a:off x="1005840" y="4242816"/>
             <a:ext cx="5029200" cy="658368"/>
           </a:xfrm>
           <a:prstGeom prst="rect">
@@ -14518,7 +16292,7 @@
         </p:nvSpPr>
         <p:spPr>
           <a:xfrm>
-            <a:off x="1143000" y="4928616"/>
+            <a:off x="1143000" y="4398264"/>
             <a:ext cx="4754880" cy="411480"/>
           </a:xfrm>
           <a:prstGeom prst="rect">
@@ -14552,7 +16326,7 @@
         </p:nvSpPr>
         <p:spPr>
           <a:xfrm>
-            <a:off x="411480" y="5669280"/>
+            <a:off x="411480" y="5029200"/>
             <a:ext cx="594360" cy="658368"/>
           </a:xfrm>
           <a:prstGeom prst="rect">
@@ -14595,7 +16369,7 @@
         </p:nvSpPr>
         <p:spPr>
           <a:xfrm>
-            <a:off x="411480" y="5760720"/>
+            <a:off x="411480" y="5120640"/>
             <a:ext cx="594360" cy="475488"/>
           </a:xfrm>
           <a:prstGeom prst="rect">
@@ -14629,7 +16403,7 @@
         </p:nvSpPr>
         <p:spPr>
           <a:xfrm>
-            <a:off x="1005840" y="5669280"/>
+            <a:off x="1005840" y="5029200"/>
             <a:ext cx="5029200" cy="658368"/>
           </a:xfrm>
           <a:prstGeom prst="rect">
@@ -14672,7 +16446,7 @@
         </p:nvSpPr>
         <p:spPr>
           <a:xfrm>
-            <a:off x="1143000" y="5824728"/>
+            <a:off x="1143000" y="5184648"/>
             <a:ext cx="4754880" cy="411480"/>
           </a:xfrm>
           <a:prstGeom prst="rect">
@@ -14706,7 +16480,7 @@
         </p:nvSpPr>
         <p:spPr>
           <a:xfrm>
-            <a:off x="6355080" y="1188720"/>
+            <a:off x="411480" y="5815584"/>
             <a:ext cx="594360" cy="658368"/>
           </a:xfrm>
           <a:prstGeom prst="rect">
@@ -14749,7 +16523,7 @@
         </p:nvSpPr>
         <p:spPr>
           <a:xfrm>
-            <a:off x="6355080" y="1280160"/>
+            <a:off x="411480" y="5907024"/>
             <a:ext cx="594360" cy="475488"/>
           </a:xfrm>
           <a:prstGeom prst="rect">
@@ -14783,7 +16557,7 @@
         </p:nvSpPr>
         <p:spPr>
           <a:xfrm>
-            <a:off x="6949440" y="1188720"/>
+            <a:off x="1005840" y="5815584"/>
             <a:ext cx="5029200" cy="658368"/>
           </a:xfrm>
           <a:prstGeom prst="rect">
@@ -14826,7 +16600,7 @@
         </p:nvSpPr>
         <p:spPr>
           <a:xfrm>
-            <a:off x="7086600" y="1344168"/>
+            <a:off x="1143000" y="5971032"/>
             <a:ext cx="4754880" cy="411480"/>
           </a:xfrm>
           <a:prstGeom prst="rect">
@@ -14860,7 +16634,7 @@
         </p:nvSpPr>
         <p:spPr>
           <a:xfrm>
-            <a:off x="6355080" y="2084832"/>
+            <a:off x="6355080" y="1097280"/>
             <a:ext cx="594360" cy="658368"/>
           </a:xfrm>
           <a:prstGeom prst="rect">
@@ -14903,7 +16677,7 @@
         </p:nvSpPr>
         <p:spPr>
           <a:xfrm>
-            <a:off x="6355080" y="2176272"/>
+            <a:off x="6355080" y="1188720"/>
             <a:ext cx="594360" cy="475488"/>
           </a:xfrm>
           <a:prstGeom prst="rect">
@@ -14937,7 +16711,7 @@
         </p:nvSpPr>
         <p:spPr>
           <a:xfrm>
-            <a:off x="6949440" y="2084832"/>
+            <a:off x="6949440" y="1097280"/>
             <a:ext cx="5029200" cy="658368"/>
           </a:xfrm>
           <a:prstGeom prst="rect">
@@ -14980,7 +16754,7 @@
         </p:nvSpPr>
         <p:spPr>
           <a:xfrm>
-            <a:off x="7086600" y="2240280"/>
+            <a:off x="7086600" y="1252728"/>
             <a:ext cx="4754880" cy="411480"/>
           </a:xfrm>
           <a:prstGeom prst="rect">
@@ -15014,7 +16788,7 @@
         </p:nvSpPr>
         <p:spPr>
           <a:xfrm>
-            <a:off x="6355080" y="2980944"/>
+            <a:off x="6355080" y="1883664"/>
             <a:ext cx="594360" cy="658368"/>
           </a:xfrm>
           <a:prstGeom prst="rect">
@@ -15057,7 +16831,7 @@
         </p:nvSpPr>
         <p:spPr>
           <a:xfrm>
-            <a:off x="6355080" y="3072384"/>
+            <a:off x="6355080" y="1975104"/>
             <a:ext cx="594360" cy="475488"/>
           </a:xfrm>
           <a:prstGeom prst="rect">
@@ -15091,7 +16865,7 @@
         </p:nvSpPr>
         <p:spPr>
           <a:xfrm>
-            <a:off x="6949440" y="2980944"/>
+            <a:off x="6949440" y="1883664"/>
             <a:ext cx="5029200" cy="658368"/>
           </a:xfrm>
           <a:prstGeom prst="rect">
@@ -15134,7 +16908,7 @@
         </p:nvSpPr>
         <p:spPr>
           <a:xfrm>
-            <a:off x="7086600" y="3136391"/>
+            <a:off x="7086600" y="2039112"/>
             <a:ext cx="4754880" cy="411480"/>
           </a:xfrm>
           <a:prstGeom prst="rect">
@@ -15168,7 +16942,7 @@
         </p:nvSpPr>
         <p:spPr>
           <a:xfrm>
-            <a:off x="6355080" y="3877056"/>
+            <a:off x="6355080" y="2670048"/>
             <a:ext cx="594360" cy="658368"/>
           </a:xfrm>
           <a:prstGeom prst="rect">
@@ -15211,7 +16985,7 @@
         </p:nvSpPr>
         <p:spPr>
           <a:xfrm>
-            <a:off x="6355080" y="3968496"/>
+            <a:off x="6355080" y="2761488"/>
             <a:ext cx="594360" cy="475488"/>
           </a:xfrm>
           <a:prstGeom prst="rect">
@@ -15245,7 +17019,7 @@
         </p:nvSpPr>
         <p:spPr>
           <a:xfrm>
-            <a:off x="6949440" y="3877056"/>
+            <a:off x="6949440" y="2670048"/>
             <a:ext cx="5029200" cy="658368"/>
           </a:xfrm>
           <a:prstGeom prst="rect">
@@ -15288,7 +17062,7 @@
         </p:nvSpPr>
         <p:spPr>
           <a:xfrm>
-            <a:off x="7086600" y="4032504"/>
+            <a:off x="7086600" y="2825496"/>
             <a:ext cx="4754880" cy="411480"/>
           </a:xfrm>
           <a:prstGeom prst="rect">
@@ -15322,7 +17096,7 @@
         </p:nvSpPr>
         <p:spPr>
           <a:xfrm>
-            <a:off x="6355080" y="4773168"/>
+            <a:off x="6355080" y="3456432"/>
             <a:ext cx="594360" cy="658368"/>
           </a:xfrm>
           <a:prstGeom prst="rect">
@@ -15365,7 +17139,7 @@
         </p:nvSpPr>
         <p:spPr>
           <a:xfrm>
-            <a:off x="6355080" y="4864607"/>
+            <a:off x="6355080" y="3547872"/>
             <a:ext cx="594360" cy="475488"/>
           </a:xfrm>
           <a:prstGeom prst="rect">
@@ -15399,7 +17173,7 @@
         </p:nvSpPr>
         <p:spPr>
           <a:xfrm>
-            <a:off x="6949440" y="4773168"/>
+            <a:off x="6949440" y="3456432"/>
             <a:ext cx="5029200" cy="658368"/>
           </a:xfrm>
           <a:prstGeom prst="rect">
@@ -15442,7 +17216,7 @@
         </p:nvSpPr>
         <p:spPr>
           <a:xfrm>
-            <a:off x="7086600" y="4928616"/>
+            <a:off x="7086600" y="3611880"/>
             <a:ext cx="4754880" cy="411480"/>
           </a:xfrm>
           <a:prstGeom prst="rect">
@@ -15476,7 +17250,161 @@
         </p:nvSpPr>
         <p:spPr>
           <a:xfrm>
-            <a:off x="6355080" y="5669280"/>
+            <a:off x="6355080" y="4242816"/>
+            <a:ext cx="594360" cy="658368"/>
+          </a:xfrm>
+          <a:prstGeom prst="rect">
+            <a:avLst/>
+          </a:prstGeom>
+          <a:solidFill>
+            <a:srgbClr val="F5A623"/>
+          </a:solidFill>
+          <a:ln>
+            <a:noFill/>
+          </a:ln>
+        </p:spPr>
+        <p:style>
+          <a:lnRef idx="1">
+            <a:schemeClr val="accent1"/>
+          </a:lnRef>
+          <a:fillRef idx="3">
+            <a:schemeClr val="accent1"/>
+          </a:fillRef>
+          <a:effectRef idx="2">
+            <a:schemeClr val="accent1"/>
+          </a:effectRef>
+          <a:fontRef idx="minor">
+            <a:schemeClr val="lt1"/>
+          </a:fontRef>
+        </p:style>
+        <p:txBody>
+          <a:bodyPr rtlCol="0" anchor="ctr"/>
+          <a:lstStyle/>
+          <a:p>
+            <a:pPr algn="ctr"/>
+          </a:p>
+        </p:txBody>
+      </p:sp>
+      <p:sp>
+        <p:nvSpPr>
+          <p:cNvPr id="52" name="TextBox 51"/>
+          <p:cNvSpPr txBox="1"/>
+          <p:nvPr/>
+        </p:nvSpPr>
+        <p:spPr>
+          <a:xfrm>
+            <a:off x="6355080" y="4334255"/>
+            <a:ext cx="594360" cy="475488"/>
+          </a:xfrm>
+          <a:prstGeom prst="rect">
+            <a:avLst/>
+          </a:prstGeom>
+          <a:noFill/>
+        </p:spPr>
+        <p:txBody>
+          <a:bodyPr wrap="square">
+            <a:spAutoFit/>
+          </a:bodyPr>
+          <a:lstStyle/>
+          <a:p>
+            <a:pPr algn="ctr"/>
+            <a:r>
+              <a:rPr sz="1500" b="1" i="0">
+                <a:solidFill>
+                  <a:srgbClr val="FFFFFF"/>
+                </a:solidFill>
+              </a:rPr>
+              <a:t>13</a:t>
+            </a:r>
+          </a:p>
+        </p:txBody>
+      </p:sp>
+      <p:sp>
+        <p:nvSpPr>
+          <p:cNvPr id="53" name="Rectangle 52"/>
+          <p:cNvSpPr/>
+          <p:nvPr/>
+        </p:nvSpPr>
+        <p:spPr>
+          <a:xfrm>
+            <a:off x="6949440" y="4242816"/>
+            <a:ext cx="5029200" cy="658368"/>
+          </a:xfrm>
+          <a:prstGeom prst="rect">
+            <a:avLst/>
+          </a:prstGeom>
+          <a:solidFill>
+            <a:srgbClr val="FFFFFF"/>
+          </a:solidFill>
+          <a:ln>
+            <a:noFill/>
+          </a:ln>
+        </p:spPr>
+        <p:style>
+          <a:lnRef idx="1">
+            <a:schemeClr val="accent1"/>
+          </a:lnRef>
+          <a:fillRef idx="3">
+            <a:schemeClr val="accent1"/>
+          </a:fillRef>
+          <a:effectRef idx="2">
+            <a:schemeClr val="accent1"/>
+          </a:effectRef>
+          <a:fontRef idx="minor">
+            <a:schemeClr val="lt1"/>
+          </a:fontRef>
+        </p:style>
+        <p:txBody>
+          <a:bodyPr rtlCol="0" anchor="ctr"/>
+          <a:lstStyle/>
+          <a:p>
+            <a:pPr algn="ctr"/>
+          </a:p>
+        </p:txBody>
+      </p:sp>
+      <p:sp>
+        <p:nvSpPr>
+          <p:cNvPr id="54" name="TextBox 53"/>
+          <p:cNvSpPr txBox="1"/>
+          <p:nvPr/>
+        </p:nvSpPr>
+        <p:spPr>
+          <a:xfrm>
+            <a:off x="7086600" y="4398264"/>
+            <a:ext cx="4754880" cy="411480"/>
+          </a:xfrm>
+          <a:prstGeom prst="rect">
+            <a:avLst/>
+          </a:prstGeom>
+          <a:noFill/>
+        </p:spPr>
+        <p:txBody>
+          <a:bodyPr wrap="square">
+            <a:spAutoFit/>
+          </a:bodyPr>
+          <a:lstStyle/>
+          <a:p>
+            <a:pPr algn="l"/>
+            <a:r>
+              <a:rPr sz="1400" b="0" i="0">
+                <a:solidFill>
+                  <a:srgbClr val="1A1A2E"/>
+                </a:solidFill>
+              </a:rPr>
+              <a:t>RAG 문서 검색 확장 (신규)</a:t>
+            </a:r>
+          </a:p>
+        </p:txBody>
+      </p:sp>
+      <p:sp>
+        <p:nvSpPr>
+          <p:cNvPr id="55" name="Rectangle 54"/>
+          <p:cNvSpPr/>
+          <p:nvPr/>
+        </p:nvSpPr>
+        <p:spPr>
+          <a:xfrm>
+            <a:off x="6355080" y="5029200"/>
             <a:ext cx="594360" cy="658368"/>
           </a:xfrm>
           <a:prstGeom prst="rect">
@@ -15513,13 +17441,13 @@
       </p:sp>
       <p:sp>
         <p:nvSpPr>
-          <p:cNvPr id="52" name="TextBox 51"/>
-          <p:cNvSpPr txBox="1"/>
-          <p:nvPr/>
-        </p:nvSpPr>
-        <p:spPr>
-          <a:xfrm>
-            <a:off x="6355080" y="5760720"/>
+          <p:cNvPr id="56" name="TextBox 55"/>
+          <p:cNvSpPr txBox="1"/>
+          <p:nvPr/>
+        </p:nvSpPr>
+        <p:spPr>
+          <a:xfrm>
+            <a:off x="6355080" y="5120640"/>
             <a:ext cx="594360" cy="475488"/>
           </a:xfrm>
           <a:prstGeom prst="rect">
@@ -15540,20 +17468,20 @@
                   <a:srgbClr val="FFFFFF"/>
                 </a:solidFill>
               </a:rPr>
-              <a:t>12</a:t>
-            </a:r>
-          </a:p>
-        </p:txBody>
-      </p:sp>
-      <p:sp>
-        <p:nvSpPr>
-          <p:cNvPr id="53" name="Rectangle 52"/>
+              <a:t>14</a:t>
+            </a:r>
+          </a:p>
+        </p:txBody>
+      </p:sp>
+      <p:sp>
+        <p:nvSpPr>
+          <p:cNvPr id="57" name="Rectangle 56"/>
           <p:cNvSpPr/>
           <p:nvPr/>
         </p:nvSpPr>
         <p:spPr>
           <a:xfrm>
-            <a:off x="6949440" y="5669280"/>
+            <a:off x="6949440" y="5029200"/>
             <a:ext cx="5029200" cy="658368"/>
           </a:xfrm>
           <a:prstGeom prst="rect">
@@ -15590,13 +17518,13 @@
       </p:sp>
       <p:sp>
         <p:nvSpPr>
-          <p:cNvPr id="54" name="TextBox 53"/>
-          <p:cNvSpPr txBox="1"/>
-          <p:nvPr/>
-        </p:nvSpPr>
-        <p:spPr>
-          <a:xfrm>
-            <a:off x="7086600" y="5824728"/>
+          <p:cNvPr id="58" name="TextBox 57"/>
+          <p:cNvSpPr txBox="1"/>
+          <p:nvPr/>
+        </p:nvSpPr>
+        <p:spPr>
+          <a:xfrm>
+            <a:off x="7086600" y="5184648"/>
             <a:ext cx="4754880" cy="411480"/>
           </a:xfrm>
           <a:prstGeom prst="rect">
@@ -16832,7 +18760,7 @@
                   <a:srgbClr val="1A1A2E"/>
                 </a:solidFill>
               </a:rPr>
-              <a:t>▸  Lot / 주문 테이블</a:t>
+              <a:t>▸  AI 채팅(출처 표시)+문서관리</a:t>
             </a:r>
           </a:p>
         </p:txBody>
@@ -16866,7 +18794,7 @@
                   <a:srgbClr val="1A1A2E"/>
                 </a:solidFill>
               </a:rPr>
-              <a:t>▸  AI 채팅 박스</a:t>
+              <a:t>▸  📎 업로드 버튼 (RAG)</a:t>
             </a:r>
           </a:p>
         </p:txBody>
@@ -17089,7 +19017,7 @@
                   <a:srgbClr val="1A1A2E"/>
                 </a:solidFill>
               </a:rPr>
-              <a:t>▸  REST API 8개</a:t>
+              <a:t>▸  REST API 8개 + /api/ai/chat</a:t>
             </a:r>
           </a:p>
         </p:txBody>
@@ -17123,7 +19051,7 @@
                   <a:srgbClr val="1A1A2E"/>
                 </a:solidFill>
               </a:rPr>
-              <a:t>▸  AiChatService</a:t>
+              <a:t>▸  AiChatService (SQL↔RAG 분류)</a:t>
             </a:r>
           </a:p>
         </p:txBody>
@@ -17191,7 +19119,7 @@
                   <a:srgbClr val="1A1A2E"/>
                 </a:solidFill>
               </a:rPr>
-              <a:t>▸  HikariCP 커넥션 풀</a:t>
+              <a:t>▸  rag-service :8081 (RAG 확장)</a:t>
             </a:r>
           </a:p>
         </p:txBody>
@@ -17414,7 +19342,7 @@
                   <a:srgbClr val="1A1A2E"/>
                 </a:solidFill>
               </a:rPr>
-              <a:t>▸  5개 테이블</a:t>
+              <a:t>▸  5개 테이블 + 문서 2종(RAG)</a:t>
             </a:r>
           </a:p>
         </p:txBody>
@@ -17448,7 +19376,7 @@
                   <a:srgbClr val="1A1A2E"/>
                 </a:solidFill>
               </a:rPr>
-              <a:t>▸  6개 집계 View</a:t>
+              <a:t>▸  pgvector 확장 (임베딩 검색)</a:t>
             </a:r>
           </a:p>
         </p:txBody>
@@ -17482,7 +19410,7 @@
                   <a:srgbClr val="1A1A2E"/>
                 </a:solidFill>
               </a:rPr>
-              <a:t>▸  인덱스 14개</a:t>
+              <a:t>▸  6개 집계 View</a:t>
             </a:r>
           </a:p>
         </p:txBody>
@@ -17516,7 +19444,7 @@
                   <a:srgbClr val="1A1A2E"/>
                 </a:solidFill>
               </a:rPr>
-              <a:t>▸  자동 updated_at 트리거</a:t>
+              <a:t>▸  인덱스 14개 + ivfflat</a:t>
             </a:r>
           </a:p>
         </p:txBody>
